--- a/github.pptx
+++ b/github.pptx
@@ -15,25 +15,31 @@
     <p:sldId id="263" r:id="rId9"/>
     <p:sldId id="264" r:id="rId10"/>
     <p:sldId id="265" r:id="rId11"/>
-    <p:sldId id="266" r:id="rId12"/>
-    <p:sldId id="267" r:id="rId13"/>
-    <p:sldId id="268" r:id="rId14"/>
-    <p:sldId id="269" r:id="rId15"/>
-    <p:sldId id="270" r:id="rId16"/>
-    <p:sldId id="271" r:id="rId17"/>
-    <p:sldId id="272" r:id="rId18"/>
-    <p:sldId id="273" r:id="rId19"/>
-    <p:sldId id="274" r:id="rId20"/>
-    <p:sldId id="275" r:id="rId21"/>
-    <p:sldId id="276" r:id="rId22"/>
-    <p:sldId id="277" r:id="rId23"/>
-    <p:sldId id="278" r:id="rId24"/>
-    <p:sldId id="279" r:id="rId25"/>
-    <p:sldId id="280" r:id="rId26"/>
-    <p:sldId id="281" r:id="rId27"/>
-    <p:sldId id="282" r:id="rId28"/>
-    <p:sldId id="283" r:id="rId29"/>
-    <p:sldId id="284" r:id="rId30"/>
+    <p:sldId id="284" r:id="rId12"/>
+    <p:sldId id="285" r:id="rId13"/>
+    <p:sldId id="286" r:id="rId14"/>
+    <p:sldId id="287" r:id="rId15"/>
+    <p:sldId id="288" r:id="rId16"/>
+    <p:sldId id="289" r:id="rId17"/>
+    <p:sldId id="290" r:id="rId18"/>
+    <p:sldId id="266" r:id="rId19"/>
+    <p:sldId id="267" r:id="rId20"/>
+    <p:sldId id="268" r:id="rId21"/>
+    <p:sldId id="269" r:id="rId22"/>
+    <p:sldId id="270" r:id="rId23"/>
+    <p:sldId id="271" r:id="rId24"/>
+    <p:sldId id="272" r:id="rId25"/>
+    <p:sldId id="273" r:id="rId26"/>
+    <p:sldId id="274" r:id="rId27"/>
+    <p:sldId id="275" r:id="rId28"/>
+    <p:sldId id="276" r:id="rId29"/>
+    <p:sldId id="277" r:id="rId30"/>
+    <p:sldId id="278" r:id="rId31"/>
+    <p:sldId id="279" r:id="rId32"/>
+    <p:sldId id="280" r:id="rId33"/>
+    <p:sldId id="281" r:id="rId34"/>
+    <p:sldId id="282" r:id="rId35"/>
+    <p:sldId id="283" r:id="rId36"/>
   </p:sldIdLst>
   <p:sldSz cx="9144000" cy="6858000" type="screen4x3"/>
   <p:notesSz cx="6858000" cy="9144000"/>
@@ -4352,10 +4358,9 @@
           <a:lstStyle/>
           <a:p>
             <a:r>
-              <a:rPr lang="en-IN" dirty="0" smtClean="0"/>
-              <a:t>Feature Extraction</a:t>
-            </a:r>
-            <a:endParaRPr lang="en-IN" dirty="0"/>
+              <a:rPr lang="en-IN" dirty="0"/>
+              <a:t>System Architecture</a:t>
+            </a:r>
           </a:p>
         </p:txBody>
       </p:sp>
@@ -4375,43 +4380,22 @@
           <a:lstStyle/>
           <a:p>
             <a:r>
-              <a:rPr lang="en-US" dirty="0" smtClean="0"/>
-              <a:t>Feature extraction converts text data into numerical form.</a:t>
-            </a:r>
-          </a:p>
-          <a:p>
-            <a:r>
-              <a:rPr lang="en-US" dirty="0" smtClean="0"/>
-              <a:t>Techniques used:</a:t>
-            </a:r>
-          </a:p>
-          <a:p>
-            <a:r>
-              <a:rPr lang="en-US" dirty="0" smtClean="0"/>
-              <a:t>TF-IDF </a:t>
-            </a:r>
-          </a:p>
-          <a:p>
-            <a:r>
-              <a:rPr lang="en-US" dirty="0" smtClean="0"/>
-              <a:t>Bag of Words </a:t>
-            </a:r>
-          </a:p>
-          <a:p>
-            <a:r>
-              <a:rPr lang="en-US" dirty="0" smtClean="0"/>
-              <a:t>These techniques help in identifying important keywords and patterns in resumes.</a:t>
-            </a:r>
-          </a:p>
-          <a:p>
-            <a:endParaRPr lang="en-IN" dirty="0"/>
+              <a:rPr lang="en-IN" dirty="0"/>
+              <a:t>User → Upload Resume → Text Extraction → NLP Processing</a:t>
+            </a:r>
+          </a:p>
+          <a:p>
+            <a:r>
+              <a:rPr lang="en-IN" dirty="0"/>
+              <a:t>     → Skill Matching → Similarity Score → Ranking → Output Dashboard</a:t>
+            </a:r>
           </a:p>
         </p:txBody>
       </p:sp>
     </p:spTree>
     <p:extLst>
       <p:ext uri="{BB962C8B-B14F-4D97-AF65-F5344CB8AC3E}">
-        <p14:creationId xmlns:p14="http://schemas.microsoft.com/office/powerpoint/2010/main" val="3469599495"/>
+        <p14:creationId xmlns:p14="http://schemas.microsoft.com/office/powerpoint/2010/main" val="1498790352"/>
       </p:ext>
     </p:extLst>
   </p:cSld>
@@ -4454,10 +4438,9 @@
           <a:lstStyle/>
           <a:p>
             <a:r>
-              <a:rPr lang="en-IN" dirty="0" smtClean="0"/>
-              <a:t>Machine Learning Model</a:t>
-            </a:r>
-            <a:endParaRPr lang="en-IN" dirty="0"/>
+              <a:rPr lang="en-IN" dirty="0"/>
+              <a:t>Technologies Used</a:t>
+            </a:r>
           </a:p>
         </p:txBody>
       </p:sp>
@@ -4477,49 +4460,80 @@
           <a:lstStyle/>
           <a:p>
             <a:r>
-              <a:rPr lang="en-US" dirty="0" smtClean="0"/>
-              <a:t>The system uses machine learning models to classify and rank resumes.</a:t>
-            </a:r>
-          </a:p>
-          <a:p>
-            <a:r>
-              <a:rPr lang="en-US" dirty="0" smtClean="0"/>
-              <a:t>Possible models:</a:t>
-            </a:r>
-          </a:p>
-          <a:p>
-            <a:r>
-              <a:rPr lang="en-US" dirty="0" smtClean="0"/>
-              <a:t>Logistic Regression </a:t>
-            </a:r>
-          </a:p>
-          <a:p>
-            <a:r>
-              <a:rPr lang="en-US" dirty="0" smtClean="0"/>
-              <a:t>Naive Bayes </a:t>
-            </a:r>
-          </a:p>
-          <a:p>
-            <a:r>
-              <a:rPr lang="en-US" dirty="0" smtClean="0"/>
-              <a:t>Support Vector Machine </a:t>
-            </a:r>
-          </a:p>
-          <a:p>
-            <a:r>
-              <a:rPr lang="en-US" dirty="0" smtClean="0"/>
-              <a:t>The model is trained on labeled data to improve prediction accuracy.</a:t>
-            </a:r>
-          </a:p>
-          <a:p>
-            <a:endParaRPr lang="en-IN" dirty="0"/>
+              <a:rPr lang="en-IN" dirty="0"/>
+              <a:t>Python </a:t>
+            </a:r>
+            <a:endParaRPr lang="en-IN" dirty="0" smtClean="0"/>
+          </a:p>
+          <a:p>
+            <a:r>
+              <a:rPr lang="en-IN" dirty="0" smtClean="0"/>
+              <a:t>NLP </a:t>
+            </a:r>
+            <a:r>
+              <a:rPr lang="en-IN" dirty="0"/>
+              <a:t>(NLTK / </a:t>
+            </a:r>
+            <a:r>
+              <a:rPr lang="en-IN" dirty="0" err="1"/>
+              <a:t>spaCy</a:t>
+            </a:r>
+            <a:r>
+              <a:rPr lang="en-IN" dirty="0"/>
+              <a:t>) </a:t>
+            </a:r>
+            <a:endParaRPr lang="en-IN" dirty="0" smtClean="0"/>
+          </a:p>
+          <a:p>
+            <a:r>
+              <a:rPr lang="en-IN" dirty="0" smtClean="0"/>
+              <a:t>Machine </a:t>
+            </a:r>
+            <a:r>
+              <a:rPr lang="en-IN" dirty="0"/>
+              <a:t>Learning (</a:t>
+            </a:r>
+            <a:r>
+              <a:rPr lang="en-IN" dirty="0" err="1"/>
+              <a:t>Scikit</a:t>
+            </a:r>
+            <a:r>
+              <a:rPr lang="en-IN" dirty="0"/>
+              <a:t>-learn) </a:t>
+            </a:r>
+            <a:endParaRPr lang="en-IN" dirty="0" smtClean="0"/>
+          </a:p>
+          <a:p>
+            <a:r>
+              <a:rPr lang="en-IN" dirty="0" err="1" smtClean="0"/>
+              <a:t>Streamlit</a:t>
+            </a:r>
+            <a:r>
+              <a:rPr lang="en-IN" dirty="0" smtClean="0"/>
+              <a:t> </a:t>
+            </a:r>
+            <a:r>
+              <a:rPr lang="en-IN" dirty="0"/>
+              <a:t>(UI) </a:t>
+            </a:r>
+            <a:endParaRPr lang="en-IN" dirty="0" smtClean="0"/>
+          </a:p>
+          <a:p>
+            <a:r>
+              <a:rPr lang="en-IN" dirty="0" smtClean="0"/>
+              <a:t>PDF/DOCX </a:t>
+            </a:r>
+            <a:r>
+              <a:rPr lang="en-IN" dirty="0"/>
+              <a:t>parsing</a:t>
+            </a:r>
           </a:p>
         </p:txBody>
       </p:sp>
     </p:spTree>
     <p:extLst>
       <p:ext uri="{BB962C8B-B14F-4D97-AF65-F5344CB8AC3E}">
-        <p14:creationId xmlns:p14="http://schemas.microsoft.com/office/powerpoint/2010/main" val="3844296670"/>
+        <p14:creationId xmlns:p14="http://schemas.microsoft.com/office/powerpoint/2010/main" val="2663934834"/>
       </p:ext>
     </p:extLst>
   </p:cSld>
@@ -4562,10 +4576,9 @@
           <a:lstStyle/>
           <a:p>
             <a:r>
-              <a:rPr lang="en-IN" dirty="0" smtClean="0"/>
-              <a:t>Candidate Ranking</a:t>
-            </a:r>
-            <a:endParaRPr lang="en-IN" dirty="0"/>
+              <a:rPr lang="en-IN" dirty="0"/>
+              <a:t>Algorithm Used</a:t>
+            </a:r>
           </a:p>
         </p:txBody>
       </p:sp>
@@ -4585,35 +4598,28 @@
           <a:lstStyle/>
           <a:p>
             <a:r>
-              <a:rPr lang="en-US" dirty="0" smtClean="0"/>
-              <a:t>Candidates are ranked based on:</a:t>
-            </a:r>
-          </a:p>
-          <a:p>
-            <a:r>
-              <a:rPr lang="en-US" dirty="0" smtClean="0"/>
-              <a:t>Skill match </a:t>
-            </a:r>
-          </a:p>
-          <a:p>
-            <a:r>
-              <a:rPr lang="en-US" dirty="0" smtClean="0"/>
-              <a:t>Experience </a:t>
-            </a:r>
-          </a:p>
-          <a:p>
-            <a:r>
-              <a:rPr lang="en-US" dirty="0" smtClean="0"/>
-              <a:t>Education </a:t>
-            </a:r>
-          </a:p>
-          <a:p>
-            <a:r>
-              <a:rPr lang="en-US" dirty="0" smtClean="0"/>
-              <a:t>The system assigns scores and ranks candidates accordingly.</a:t>
-            </a:r>
-          </a:p>
-          <a:p>
+              <a:rPr lang="en-US" dirty="0"/>
+              <a:t>TF-IDF (Text </a:t>
+            </a:r>
+            <a:r>
+              <a:rPr lang="en-US" dirty="0" err="1"/>
+              <a:t>vectorization</a:t>
+            </a:r>
+            <a:r>
+              <a:rPr lang="en-US" dirty="0"/>
+              <a:t>) </a:t>
+            </a:r>
+            <a:endParaRPr lang="en-US" dirty="0" smtClean="0"/>
+          </a:p>
+          <a:p>
+            <a:r>
+              <a:rPr lang="en-US" dirty="0" smtClean="0"/>
+              <a:t>Cosine </a:t>
+            </a:r>
+            <a:r>
+              <a:rPr lang="en-US" dirty="0"/>
+              <a:t>Similarity</a:t>
+            </a:r>
             <a:endParaRPr lang="en-IN" dirty="0"/>
           </a:p>
         </p:txBody>
@@ -4621,7 +4627,7 @@
     </p:spTree>
     <p:extLst>
       <p:ext uri="{BB962C8B-B14F-4D97-AF65-F5344CB8AC3E}">
-        <p14:creationId xmlns:p14="http://schemas.microsoft.com/office/powerpoint/2010/main" val="2679294141"/>
+        <p14:creationId xmlns:p14="http://schemas.microsoft.com/office/powerpoint/2010/main" val="3497369982"/>
       </p:ext>
     </p:extLst>
   </p:cSld>
@@ -4664,10 +4670,9 @@
           <a:lstStyle/>
           <a:p>
             <a:r>
-              <a:rPr lang="en-IN" dirty="0" smtClean="0"/>
-              <a:t>Workflow</a:t>
-            </a:r>
-            <a:endParaRPr lang="en-IN" dirty="0"/>
+              <a:rPr lang="en-IN" dirty="0"/>
+              <a:t>Advantages</a:t>
+            </a:r>
           </a:p>
         </p:txBody>
       </p:sp>
@@ -4683,59 +4688,41 @@
         </p:nvSpPr>
         <p:spPr/>
         <p:txBody>
-          <a:bodyPr>
-            <a:normAutofit/>
-          </a:bodyPr>
-          <a:lstStyle/>
-          <a:p>
-            <a:r>
-              <a:rPr lang="en-US" dirty="0" smtClean="0"/>
-              <a:t>The workflow of the system:</a:t>
-            </a:r>
-          </a:p>
-          <a:p>
-            <a:r>
-              <a:rPr lang="en-US" dirty="0" smtClean="0"/>
-              <a:t>Resume upload </a:t>
-            </a:r>
-          </a:p>
-          <a:p>
-            <a:r>
-              <a:rPr lang="en-US" dirty="0" smtClean="0"/>
-              <a:t>Text extraction </a:t>
-            </a:r>
-          </a:p>
-          <a:p>
-            <a:r>
-              <a:rPr lang="en-US" dirty="0" smtClean="0"/>
-              <a:t>Data preprocessing </a:t>
-            </a:r>
-          </a:p>
-          <a:p>
-            <a:r>
-              <a:rPr lang="en-US" dirty="0" smtClean="0"/>
-              <a:t>Feature extraction </a:t>
-            </a:r>
-          </a:p>
-          <a:p>
-            <a:r>
-              <a:rPr lang="en-US" dirty="0" smtClean="0"/>
-              <a:t>Model prediction </a:t>
-            </a:r>
-          </a:p>
-          <a:p>
-            <a:r>
-              <a:rPr lang="en-US" dirty="0" smtClean="0"/>
-              <a:t>Ranking </a:t>
-            </a:r>
-          </a:p>
-          <a:p>
-            <a:r>
-              <a:rPr lang="en-US" dirty="0" smtClean="0"/>
-              <a:t>Result display</a:t>
-            </a:r>
-          </a:p>
-          <a:p>
+          <a:bodyPr/>
+          <a:lstStyle/>
+          <a:p>
+            <a:r>
+              <a:rPr lang="en-US" dirty="0"/>
+              <a:t>Saves time </a:t>
+            </a:r>
+            <a:endParaRPr lang="en-US" dirty="0" smtClean="0"/>
+          </a:p>
+          <a:p>
+            <a:r>
+              <a:rPr lang="en-US" dirty="0" smtClean="0"/>
+              <a:t>Reduces </a:t>
+            </a:r>
+            <a:r>
+              <a:rPr lang="en-US" dirty="0"/>
+              <a:t>human effort </a:t>
+            </a:r>
+            <a:endParaRPr lang="en-US" dirty="0" smtClean="0"/>
+          </a:p>
+          <a:p>
+            <a:r>
+              <a:rPr lang="en-US" dirty="0" smtClean="0"/>
+              <a:t>Scalable </a:t>
+            </a:r>
+          </a:p>
+          <a:p>
+            <a:r>
+              <a:rPr lang="en-US" dirty="0" smtClean="0"/>
+              <a:t>More </a:t>
+            </a:r>
+            <a:r>
+              <a:rPr lang="en-US" dirty="0"/>
+              <a:t>consistent evaluation</a:t>
+            </a:r>
             <a:endParaRPr lang="en-IN" dirty="0"/>
           </a:p>
         </p:txBody>
@@ -4743,7 +4730,7 @@
     </p:spTree>
     <p:extLst>
       <p:ext uri="{BB962C8B-B14F-4D97-AF65-F5344CB8AC3E}">
-        <p14:creationId xmlns:p14="http://schemas.microsoft.com/office/powerpoint/2010/main" val="3046940249"/>
+        <p14:creationId xmlns:p14="http://schemas.microsoft.com/office/powerpoint/2010/main" val="3416788821"/>
       </p:ext>
     </p:extLst>
   </p:cSld>
@@ -4786,10 +4773,9 @@
           <a:lstStyle/>
           <a:p>
             <a:r>
-              <a:rPr lang="en-IN" dirty="0" smtClean="0"/>
-              <a:t>Advantages</a:t>
-            </a:r>
-            <a:endParaRPr lang="en-IN" dirty="0"/>
+              <a:rPr lang="en-IN" dirty="0"/>
+              <a:t>Limitations</a:t>
+            </a:r>
           </a:p>
         </p:txBody>
       </p:sp>
@@ -4809,35 +4795,34 @@
           <a:lstStyle/>
           <a:p>
             <a:r>
-              <a:rPr lang="en-US" dirty="0" smtClean="0"/>
-              <a:t>Saves time </a:t>
-            </a:r>
-          </a:p>
-          <a:p>
-            <a:r>
-              <a:rPr lang="en-US" dirty="0" smtClean="0"/>
-              <a:t>Reduces human bias </a:t>
-            </a:r>
-          </a:p>
-          <a:p>
-            <a:r>
-              <a:rPr lang="en-US" dirty="0" smtClean="0"/>
-              <a:t>Improves accuracy </a:t>
-            </a:r>
-          </a:p>
-          <a:p>
-            <a:r>
-              <a:rPr lang="en-US" dirty="0" smtClean="0"/>
-              <a:t>Handles large data </a:t>
-            </a:r>
-          </a:p>
-          <a:p>
-            <a:r>
-              <a:rPr lang="en-US" dirty="0" smtClean="0"/>
-              <a:t>Cost-effective </a:t>
-            </a:r>
-          </a:p>
-          <a:p>
+              <a:rPr lang="en-US" dirty="0"/>
+              <a:t>Depends on keyword </a:t>
+            </a:r>
+            <a:r>
+              <a:rPr lang="en-US" dirty="0" smtClean="0"/>
+              <a:t>matching</a:t>
+            </a:r>
+          </a:p>
+          <a:p>
+            <a:r>
+              <a:rPr lang="en-US" dirty="0" smtClean="0"/>
+              <a:t> </a:t>
+            </a:r>
+            <a:r>
+              <a:rPr lang="en-US" dirty="0"/>
+              <a:t>May miss context </a:t>
+            </a:r>
+            <a:endParaRPr lang="en-US" dirty="0" smtClean="0"/>
+          </a:p>
+          <a:p>
+            <a:r>
+              <a:rPr lang="en-US" dirty="0" smtClean="0"/>
+              <a:t>Needs </a:t>
+            </a:r>
+            <a:r>
+              <a:rPr lang="en-US" dirty="0"/>
+              <a:t>good dataset</a:t>
+            </a:r>
             <a:endParaRPr lang="en-IN" dirty="0"/>
           </a:p>
         </p:txBody>
@@ -4845,7 +4830,7 @@
     </p:spTree>
     <p:extLst>
       <p:ext uri="{BB962C8B-B14F-4D97-AF65-F5344CB8AC3E}">
-        <p14:creationId xmlns:p14="http://schemas.microsoft.com/office/powerpoint/2010/main" val="4000731259"/>
+        <p14:creationId xmlns:p14="http://schemas.microsoft.com/office/powerpoint/2010/main" val="1830748780"/>
       </p:ext>
     </p:extLst>
   </p:cSld>
@@ -4888,10 +4873,9 @@
           <a:lstStyle/>
           <a:p>
             <a:r>
-              <a:rPr lang="en-IN" dirty="0" smtClean="0"/>
-              <a:t>Limitations</a:t>
-            </a:r>
-            <a:endParaRPr lang="en-IN" dirty="0"/>
+              <a:rPr lang="en-IN" dirty="0"/>
+              <a:t>Future Scope</a:t>
+            </a:r>
           </a:p>
         </p:txBody>
       </p:sp>
@@ -4911,29 +4895,49 @@
           <a:lstStyle/>
           <a:p>
             <a:r>
-              <a:rPr lang="en-US" dirty="0" smtClean="0"/>
-              <a:t>Depends on data quality </a:t>
-            </a:r>
-          </a:p>
-          <a:p>
-            <a:r>
-              <a:rPr lang="en-US" dirty="0" smtClean="0"/>
-              <a:t>May not understand context fully </a:t>
-            </a:r>
-          </a:p>
-          <a:p>
-            <a:r>
-              <a:rPr lang="en-US" dirty="0" smtClean="0"/>
-              <a:t>Requires training data </a:t>
-            </a:r>
-          </a:p>
-          <a:p>
-            <a:r>
-              <a:rPr lang="en-US" dirty="0" smtClean="0"/>
-              <a:t>Limited to predefined skills </a:t>
-            </a:r>
-          </a:p>
-          <a:p>
+              <a:rPr lang="en-US" dirty="0"/>
+              <a:t>Deep learning models (BERT</a:t>
+            </a:r>
+            <a:r>
+              <a:rPr lang="en-US" dirty="0" smtClean="0"/>
+              <a:t>)</a:t>
+            </a:r>
+          </a:p>
+          <a:p>
+            <a:r>
+              <a:rPr lang="en-US" dirty="0" smtClean="0"/>
+              <a:t> </a:t>
+            </a:r>
+            <a:r>
+              <a:rPr lang="en-US" dirty="0"/>
+              <a:t>Interview </a:t>
+            </a:r>
+            <a:r>
+              <a:rPr lang="en-US" dirty="0" err="1" smtClean="0"/>
+              <a:t>chatbot</a:t>
+            </a:r>
+            <a:endParaRPr lang="en-US" dirty="0" smtClean="0"/>
+          </a:p>
+          <a:p>
+            <a:r>
+              <a:rPr lang="en-US" dirty="0" smtClean="0"/>
+              <a:t> </a:t>
+            </a:r>
+            <a:r>
+              <a:rPr lang="en-US" dirty="0"/>
+              <a:t>Automated email system </a:t>
+            </a:r>
+            <a:endParaRPr lang="en-US" dirty="0" smtClean="0"/>
+          </a:p>
+          <a:p>
+            <a:r>
+              <a:rPr lang="en-US" dirty="0" smtClean="0"/>
+              <a:t>Bias </a:t>
+            </a:r>
+            <a:r>
+              <a:rPr lang="en-US" dirty="0"/>
+              <a:t>detection</a:t>
+            </a:r>
             <a:endParaRPr lang="en-IN" dirty="0"/>
           </a:p>
         </p:txBody>
@@ -4941,7 +4945,7 @@
     </p:spTree>
     <p:extLst>
       <p:ext uri="{BB962C8B-B14F-4D97-AF65-F5344CB8AC3E}">
-        <p14:creationId xmlns:p14="http://schemas.microsoft.com/office/powerpoint/2010/main" val="1382072816"/>
+        <p14:creationId xmlns:p14="http://schemas.microsoft.com/office/powerpoint/2010/main" val="117594690"/>
       </p:ext>
     </p:extLst>
   </p:cSld>
@@ -4984,58 +4988,162 @@
           <a:lstStyle/>
           <a:p>
             <a:r>
-              <a:rPr lang="en-IN" dirty="0" smtClean="0"/>
-              <a:t>Applications</a:t>
-            </a:r>
+              <a:rPr lang="en-IN" dirty="0"/>
+              <a:t>Simple Skill Extraction</a:t>
+            </a:r>
+          </a:p>
+        </p:txBody>
+      </p:sp>
+      <p:sp>
+        <p:nvSpPr>
+          <p:cNvPr id="3" name="Content Placeholder 2"/>
+          <p:cNvSpPr>
+            <a:spLocks noGrp="1"/>
+          </p:cNvSpPr>
+          <p:nvPr>
+            <p:ph idx="1"/>
+          </p:nvPr>
+        </p:nvSpPr>
+        <p:spPr/>
+        <p:txBody>
+          <a:bodyPr>
+            <a:normAutofit fontScale="77500" lnSpcReduction="20000"/>
+          </a:bodyPr>
+          <a:lstStyle/>
+          <a:p>
+            <a:r>
+              <a:rPr lang="en-IN" dirty="0" err="1"/>
+              <a:t>skills_db</a:t>
+            </a:r>
+            <a:r>
+              <a:rPr lang="en-IN" dirty="0"/>
+              <a:t> = ["python", "java", "</a:t>
+            </a:r>
+            <a:r>
+              <a:rPr lang="en-IN" dirty="0" err="1"/>
+              <a:t>sql</a:t>
+            </a:r>
+            <a:r>
+              <a:rPr lang="en-IN" dirty="0"/>
+              <a:t>", "machine learning", "data analysis"]</a:t>
+            </a:r>
+          </a:p>
+          <a:p>
             <a:endParaRPr lang="en-IN" dirty="0"/>
           </a:p>
-        </p:txBody>
-      </p:sp>
-      <p:sp>
-        <p:nvSpPr>
-          <p:cNvPr id="3" name="Content Placeholder 2"/>
-          <p:cNvSpPr>
-            <a:spLocks noGrp="1"/>
-          </p:cNvSpPr>
-          <p:nvPr>
-            <p:ph idx="1"/>
-          </p:nvPr>
-        </p:nvSpPr>
-        <p:spPr/>
-        <p:txBody>
-          <a:bodyPr/>
-          <a:lstStyle/>
-          <a:p>
-            <a:r>
-              <a:rPr lang="en-US" dirty="0" smtClean="0"/>
-              <a:t>Corporate hiring </a:t>
-            </a:r>
-          </a:p>
-          <a:p>
-            <a:r>
-              <a:rPr lang="en-US" dirty="0" smtClean="0"/>
-              <a:t>Recruitment agencies </a:t>
-            </a:r>
-          </a:p>
-          <a:p>
-            <a:r>
-              <a:rPr lang="en-US" dirty="0" smtClean="0"/>
-              <a:t>Campus placements </a:t>
-            </a:r>
-          </a:p>
-          <a:p>
-            <a:r>
-              <a:rPr lang="en-US" dirty="0" smtClean="0"/>
-              <a:t>Job portals</a:t>
-            </a:r>
+          <a:p>
+            <a:r>
+              <a:rPr lang="en-IN" dirty="0" err="1"/>
+              <a:t>def</a:t>
+            </a:r>
+            <a:r>
+              <a:rPr lang="en-IN" dirty="0"/>
+              <a:t> </a:t>
+            </a:r>
+            <a:r>
+              <a:rPr lang="en-IN" dirty="0" err="1"/>
+              <a:t>extract_skills</a:t>
+            </a:r>
+            <a:r>
+              <a:rPr lang="en-IN" dirty="0"/>
+              <a:t>(text):</a:t>
+            </a:r>
+          </a:p>
+          <a:p>
+            <a:r>
+              <a:rPr lang="en-IN" dirty="0"/>
+              <a:t>    found = []</a:t>
+            </a:r>
+          </a:p>
+          <a:p>
+            <a:r>
+              <a:rPr lang="en-IN" dirty="0"/>
+              <a:t>    text = </a:t>
+            </a:r>
+            <a:r>
+              <a:rPr lang="en-IN" dirty="0" err="1"/>
+              <a:t>text.lower</a:t>
+            </a:r>
+            <a:r>
+              <a:rPr lang="en-IN" dirty="0"/>
+              <a:t>()</a:t>
+            </a:r>
+          </a:p>
+          <a:p>
+            <a:r>
+              <a:rPr lang="en-IN" dirty="0"/>
+              <a:t>    </a:t>
+            </a:r>
+          </a:p>
+          <a:p>
+            <a:r>
+              <a:rPr lang="en-IN" dirty="0"/>
+              <a:t>    for skill in </a:t>
+            </a:r>
+            <a:r>
+              <a:rPr lang="en-IN" dirty="0" err="1"/>
+              <a:t>skills_db</a:t>
+            </a:r>
+            <a:r>
+              <a:rPr lang="en-IN" dirty="0"/>
+              <a:t>:</a:t>
+            </a:r>
+          </a:p>
+          <a:p>
+            <a:r>
+              <a:rPr lang="en-IN" dirty="0"/>
+              <a:t>        if skill in text:</a:t>
+            </a:r>
+          </a:p>
+          <a:p>
+            <a:r>
+              <a:rPr lang="en-IN" dirty="0"/>
+              <a:t>            </a:t>
+            </a:r>
+            <a:r>
+              <a:rPr lang="en-IN" dirty="0" err="1"/>
+              <a:t>found.append</a:t>
+            </a:r>
+            <a:r>
+              <a:rPr lang="en-IN" dirty="0"/>
+              <a:t>(skill)</a:t>
+            </a:r>
+          </a:p>
+          <a:p>
+            <a:r>
+              <a:rPr lang="en-IN" dirty="0"/>
+              <a:t>    </a:t>
+            </a:r>
+          </a:p>
+          <a:p>
+            <a:r>
+              <a:rPr lang="en-IN" dirty="0"/>
+              <a:t>    return found</a:t>
+            </a:r>
+          </a:p>
+          <a:p>
             <a:endParaRPr lang="en-IN" dirty="0"/>
+          </a:p>
+          <a:p>
+            <a:r>
+              <a:rPr lang="en-IN" dirty="0"/>
+              <a:t>print(</a:t>
+            </a:r>
+            <a:r>
+              <a:rPr lang="en-IN" dirty="0" err="1"/>
+              <a:t>extract_skills</a:t>
+            </a:r>
+            <a:r>
+              <a:rPr lang="en-IN" dirty="0"/>
+              <a:t>(resume1))</a:t>
+            </a:r>
           </a:p>
         </p:txBody>
       </p:sp>
     </p:spTree>
     <p:extLst>
       <p:ext uri="{BB962C8B-B14F-4D97-AF65-F5344CB8AC3E}">
-        <p14:creationId xmlns:p14="http://schemas.microsoft.com/office/powerpoint/2010/main" val="615434591"/>
+        <p14:creationId xmlns:p14="http://schemas.microsoft.com/office/powerpoint/2010/main" val="3100705228"/>
       </p:ext>
     </p:extLst>
   </p:cSld>
@@ -5079,7 +5187,7 @@
           <a:p>
             <a:r>
               <a:rPr lang="en-IN" dirty="0" smtClean="0"/>
-              <a:t>Future Scope</a:t>
+              <a:t>Feature Extraction</a:t>
             </a:r>
             <a:endParaRPr lang="en-IN" dirty="0"/>
           </a:p>
@@ -5102,36 +5210,34 @@
           <a:p>
             <a:r>
               <a:rPr lang="en-US" dirty="0" smtClean="0"/>
-              <a:t>Integration with job portals </a:t>
-            </a:r>
-          </a:p>
-          <a:p>
-            <a:r>
-              <a:rPr lang="en-US" dirty="0" smtClean="0"/>
-              <a:t>Deep learning models </a:t>
-            </a:r>
-          </a:p>
-          <a:p>
-            <a:r>
-              <a:rPr lang="en-US" dirty="0" smtClean="0"/>
-              <a:t>Real-time analytics </a:t>
-            </a:r>
-          </a:p>
-          <a:p>
-            <a:r>
-              <a:rPr lang="en-US" dirty="0" err="1" smtClean="0"/>
-              <a:t>Chatbot</a:t>
-            </a:r>
-            <a:r>
-              <a:rPr lang="en-US" dirty="0" smtClean="0"/>
-              <a:t> integration </a:t>
-            </a:r>
-          </a:p>
-          <a:p>
-            <a:r>
-              <a:rPr lang="en-US" dirty="0" smtClean="0"/>
-              <a:t>Resume recommendation system</a:t>
-            </a:r>
+              <a:t>Feature extraction converts text data into numerical form.</a:t>
+            </a:r>
+          </a:p>
+          <a:p>
+            <a:r>
+              <a:rPr lang="en-US" dirty="0" smtClean="0"/>
+              <a:t>Techniques used:</a:t>
+            </a:r>
+          </a:p>
+          <a:p>
+            <a:r>
+              <a:rPr lang="en-US" dirty="0" smtClean="0"/>
+              <a:t>TF-IDF </a:t>
+            </a:r>
+          </a:p>
+          <a:p>
+            <a:r>
+              <a:rPr lang="en-US" dirty="0" smtClean="0"/>
+              <a:t>Bag of Words </a:t>
+            </a:r>
+          </a:p>
+          <a:p>
+            <a:r>
+              <a:rPr lang="en-US" dirty="0" smtClean="0"/>
+              <a:t>These techniques help in identifying important keywords and patterns in resumes.</a:t>
+            </a:r>
+          </a:p>
+          <a:p>
             <a:endParaRPr lang="en-IN" dirty="0"/>
           </a:p>
         </p:txBody>
@@ -5139,7 +5245,7 @@
     </p:spTree>
     <p:extLst>
       <p:ext uri="{BB962C8B-B14F-4D97-AF65-F5344CB8AC3E}">
-        <p14:creationId xmlns:p14="http://schemas.microsoft.com/office/powerpoint/2010/main" val="1864947110"/>
+        <p14:creationId xmlns:p14="http://schemas.microsoft.com/office/powerpoint/2010/main" val="3469599495"/>
       </p:ext>
     </p:extLst>
   </p:cSld>
@@ -5183,7 +5289,7 @@
           <a:p>
             <a:r>
               <a:rPr lang="en-IN" dirty="0" smtClean="0"/>
-              <a:t>Conclusion</a:t>
+              <a:t>Machine Learning Model</a:t>
             </a:r>
             <a:endParaRPr lang="en-IN" dirty="0"/>
           </a:p>
@@ -5206,13 +5312,37 @@
           <a:p>
             <a:r>
               <a:rPr lang="en-US" dirty="0" smtClean="0"/>
-              <a:t>The AI-Based Recruitment and Resume Screening Application provides an efficient and intelligent solution to modern recruitment challenges.</a:t>
-            </a:r>
-          </a:p>
-          <a:p>
-            <a:r>
-              <a:rPr lang="en-US" dirty="0" smtClean="0"/>
-              <a:t>It reduces manual effort, improves accuracy, and ensures fair candidate evaluation. With further enhancements, it can become a powerful tool for organizations worldwide.</a:t>
+              <a:t>The system uses machine learning models to classify and rank resumes.</a:t>
+            </a:r>
+          </a:p>
+          <a:p>
+            <a:r>
+              <a:rPr lang="en-US" dirty="0" smtClean="0"/>
+              <a:t>Possible models:</a:t>
+            </a:r>
+          </a:p>
+          <a:p>
+            <a:r>
+              <a:rPr lang="en-US" dirty="0" smtClean="0"/>
+              <a:t>Logistic Regression </a:t>
+            </a:r>
+          </a:p>
+          <a:p>
+            <a:r>
+              <a:rPr lang="en-US" dirty="0" smtClean="0"/>
+              <a:t>Naive Bayes </a:t>
+            </a:r>
+          </a:p>
+          <a:p>
+            <a:r>
+              <a:rPr lang="en-US" dirty="0" smtClean="0"/>
+              <a:t>Support Vector Machine </a:t>
+            </a:r>
+          </a:p>
+          <a:p>
+            <a:r>
+              <a:rPr lang="en-US" dirty="0" smtClean="0"/>
+              <a:t>The model is trained on labeled data to improve prediction accuracy.</a:t>
             </a:r>
           </a:p>
           <a:p>
@@ -5223,7 +5353,7 @@
     </p:spTree>
     <p:extLst>
       <p:ext uri="{BB962C8B-B14F-4D97-AF65-F5344CB8AC3E}">
-        <p14:creationId xmlns:p14="http://schemas.microsoft.com/office/powerpoint/2010/main" val="1405452821"/>
+        <p14:creationId xmlns:p14="http://schemas.microsoft.com/office/powerpoint/2010/main" val="3844296670"/>
       </p:ext>
     </p:extLst>
   </p:cSld>
@@ -5354,14 +5484,12 @@
         </p:nvSpPr>
         <p:spPr/>
         <p:txBody>
-          <a:bodyPr>
-            <a:normAutofit/>
-          </a:bodyPr>
-          <a:lstStyle/>
-          <a:p>
-            <a:r>
-              <a:rPr lang="en-IN" dirty="0" smtClean="0"/>
-              <a:t>Resume Upload &amp; Text Extraction</a:t>
+          <a:bodyPr/>
+          <a:lstStyle/>
+          <a:p>
+            <a:r>
+              <a:rPr lang="en-IN" dirty="0" smtClean="0"/>
+              <a:t>Candidate Ranking</a:t>
             </a:r>
             <a:endParaRPr lang="en-IN" dirty="0"/>
           </a:p>
@@ -5379,102 +5507,39 @@
         </p:nvSpPr>
         <p:spPr/>
         <p:txBody>
-          <a:bodyPr>
-            <a:normAutofit lnSpcReduction="10000"/>
-          </a:bodyPr>
-          <a:lstStyle/>
-          <a:p>
-            <a:r>
-              <a:rPr lang="en-IN" dirty="0" smtClean="0"/>
-              <a:t>import PyPDF2</a:t>
-            </a:r>
-          </a:p>
-          <a:p>
-            <a:endParaRPr lang="en-IN" dirty="0" smtClean="0"/>
-          </a:p>
-          <a:p>
-            <a:r>
-              <a:rPr lang="en-IN" dirty="0" err="1" smtClean="0"/>
-              <a:t>def</a:t>
-            </a:r>
-            <a:r>
-              <a:rPr lang="en-IN" dirty="0" smtClean="0"/>
-              <a:t> </a:t>
-            </a:r>
-            <a:r>
-              <a:rPr lang="en-IN" dirty="0" err="1" smtClean="0"/>
-              <a:t>extract_text_from_pdf</a:t>
-            </a:r>
-            <a:r>
-              <a:rPr lang="en-IN" dirty="0" smtClean="0"/>
-              <a:t>(file):</a:t>
-            </a:r>
-          </a:p>
-          <a:p>
-            <a:r>
-              <a:rPr lang="en-IN" dirty="0" smtClean="0"/>
-              <a:t>    text = ""</a:t>
-            </a:r>
-          </a:p>
-          <a:p>
-            <a:r>
-              <a:rPr lang="en-IN" dirty="0" smtClean="0"/>
-              <a:t>    </a:t>
-            </a:r>
-            <a:r>
-              <a:rPr lang="en-IN" dirty="0" err="1" smtClean="0"/>
-              <a:t>pdf_reader</a:t>
-            </a:r>
-            <a:r>
-              <a:rPr lang="en-IN" dirty="0" smtClean="0"/>
-              <a:t> = PyPDF2.PdfReader(file)</a:t>
-            </a:r>
-          </a:p>
-          <a:p>
-            <a:r>
-              <a:rPr lang="en-IN" dirty="0" smtClean="0"/>
-              <a:t>    </a:t>
-            </a:r>
-          </a:p>
-          <a:p>
-            <a:r>
-              <a:rPr lang="en-IN" dirty="0" smtClean="0"/>
-              <a:t>    for page in </a:t>
-            </a:r>
-            <a:r>
-              <a:rPr lang="en-IN" dirty="0" err="1" smtClean="0"/>
-              <a:t>pdf_reader.pages</a:t>
-            </a:r>
-            <a:r>
-              <a:rPr lang="en-IN" dirty="0" smtClean="0"/>
-              <a:t>:</a:t>
-            </a:r>
-          </a:p>
-          <a:p>
-            <a:r>
-              <a:rPr lang="en-IN" dirty="0" smtClean="0"/>
-              <a:t>        text += </a:t>
-            </a:r>
-            <a:r>
-              <a:rPr lang="en-IN" dirty="0" err="1" smtClean="0"/>
-              <a:t>page.extract_text</a:t>
-            </a:r>
-            <a:r>
-              <a:rPr lang="en-IN" dirty="0" smtClean="0"/>
-              <a:t>()</a:t>
-            </a:r>
-          </a:p>
-          <a:p>
-            <a:r>
-              <a:rPr lang="en-IN" dirty="0" smtClean="0"/>
-              <a:t>        </a:t>
-            </a:r>
-          </a:p>
-          <a:p>
-            <a:r>
-              <a:rPr lang="en-IN" dirty="0" smtClean="0"/>
-              <a:t>    return text</a:t>
-            </a:r>
+          <a:bodyPr/>
+          <a:lstStyle/>
+          <a:p>
+            <a:r>
+              <a:rPr lang="en-US" dirty="0" smtClean="0"/>
+              <a:t>Candidates are ranked based on:</a:t>
+            </a:r>
+          </a:p>
+          <a:p>
+            <a:r>
+              <a:rPr lang="en-US" dirty="0" smtClean="0"/>
+              <a:t>Skill match </a:t>
+            </a:r>
+          </a:p>
+          <a:p>
+            <a:r>
+              <a:rPr lang="en-US" dirty="0" smtClean="0"/>
+              <a:t>Experience </a:t>
+            </a:r>
+          </a:p>
+          <a:p>
+            <a:r>
+              <a:rPr lang="en-US" dirty="0" smtClean="0"/>
+              <a:t>Education </a:t>
+            </a:r>
+          </a:p>
+          <a:p>
+            <a:r>
+              <a:rPr lang="en-US" dirty="0" smtClean="0"/>
+              <a:t>The system assigns scores and ranks candidates accordingly.</a:t>
+            </a:r>
+          </a:p>
+          <a:p>
             <a:endParaRPr lang="en-IN" dirty="0"/>
           </a:p>
         </p:txBody>
@@ -5482,7 +5547,7 @@
     </p:spTree>
     <p:extLst>
       <p:ext uri="{BB962C8B-B14F-4D97-AF65-F5344CB8AC3E}">
-        <p14:creationId xmlns:p14="http://schemas.microsoft.com/office/powerpoint/2010/main" val="947341881"/>
+        <p14:creationId xmlns:p14="http://schemas.microsoft.com/office/powerpoint/2010/main" val="2679294141"/>
       </p:ext>
     </p:extLst>
   </p:cSld>
@@ -5526,11 +5591,7 @@
           <a:p>
             <a:r>
               <a:rPr lang="en-IN" dirty="0" smtClean="0"/>
-              <a:t>Data </a:t>
-            </a:r>
-            <a:r>
-              <a:rPr lang="en-IN" dirty="0" err="1" smtClean="0"/>
-              <a:t>Preprocessing</a:t>
+              <a:t>Workflow</a:t>
             </a:r>
             <a:endParaRPr lang="en-IN" dirty="0"/>
           </a:p>
@@ -5549,168 +5610,58 @@
         <p:spPr/>
         <p:txBody>
           <a:bodyPr>
-            <a:normAutofit fontScale="70000" lnSpcReduction="20000"/>
+            <a:normAutofit/>
           </a:bodyPr>
           <a:lstStyle/>
           <a:p>
             <a:r>
-              <a:rPr lang="en-IN" dirty="0" smtClean="0"/>
-              <a:t>import re</a:t>
-            </a:r>
-          </a:p>
-          <a:p>
-            <a:r>
-              <a:rPr lang="en-IN" dirty="0" smtClean="0"/>
-              <a:t>import </a:t>
-            </a:r>
-            <a:r>
-              <a:rPr lang="en-IN" dirty="0" err="1" smtClean="0"/>
-              <a:t>nltk</a:t>
-            </a:r>
-            <a:endParaRPr lang="en-IN" dirty="0" smtClean="0"/>
-          </a:p>
-          <a:p>
-            <a:r>
-              <a:rPr lang="en-IN" dirty="0" smtClean="0"/>
-              <a:t>from </a:t>
-            </a:r>
-            <a:r>
-              <a:rPr lang="en-IN" dirty="0" err="1" smtClean="0"/>
-              <a:t>nltk.corpus</a:t>
-            </a:r>
-            <a:r>
-              <a:rPr lang="en-IN" dirty="0" smtClean="0"/>
-              <a:t> import </a:t>
-            </a:r>
-            <a:r>
-              <a:rPr lang="en-IN" dirty="0" err="1" smtClean="0"/>
-              <a:t>stopwords</a:t>
-            </a:r>
-            <a:endParaRPr lang="en-IN" dirty="0" smtClean="0"/>
-          </a:p>
-          <a:p>
-            <a:endParaRPr lang="en-IN" dirty="0" smtClean="0"/>
-          </a:p>
-          <a:p>
-            <a:r>
-              <a:rPr lang="en-IN" dirty="0" err="1" smtClean="0"/>
-              <a:t>nltk.download</a:t>
-            </a:r>
-            <a:r>
-              <a:rPr lang="en-IN" dirty="0" smtClean="0"/>
-              <a:t>('</a:t>
-            </a:r>
-            <a:r>
-              <a:rPr lang="en-IN" dirty="0" err="1" smtClean="0"/>
-              <a:t>stopwords</a:t>
-            </a:r>
-            <a:r>
-              <a:rPr lang="en-IN" dirty="0" smtClean="0"/>
-              <a:t>')</a:t>
-            </a:r>
-          </a:p>
-          <a:p>
-            <a:endParaRPr lang="en-IN" dirty="0" smtClean="0"/>
-          </a:p>
-          <a:p>
-            <a:r>
-              <a:rPr lang="en-IN" dirty="0" err="1" smtClean="0"/>
-              <a:t>def</a:t>
-            </a:r>
-            <a:r>
-              <a:rPr lang="en-IN" dirty="0" smtClean="0"/>
-              <a:t> </a:t>
-            </a:r>
-            <a:r>
-              <a:rPr lang="en-IN" dirty="0" err="1" smtClean="0"/>
-              <a:t>preprocess_text</a:t>
-            </a:r>
-            <a:r>
-              <a:rPr lang="en-IN" dirty="0" smtClean="0"/>
-              <a:t>(text):</a:t>
-            </a:r>
-          </a:p>
-          <a:p>
-            <a:r>
-              <a:rPr lang="en-IN" dirty="0" smtClean="0"/>
-              <a:t>    text = </a:t>
-            </a:r>
-            <a:r>
-              <a:rPr lang="en-IN" dirty="0" err="1" smtClean="0"/>
-              <a:t>text.lower</a:t>
-            </a:r>
-            <a:r>
-              <a:rPr lang="en-IN" dirty="0" smtClean="0"/>
-              <a:t>()</a:t>
-            </a:r>
-          </a:p>
-          <a:p>
-            <a:r>
-              <a:rPr lang="en-IN" dirty="0" smtClean="0"/>
-              <a:t>    text = </a:t>
-            </a:r>
-            <a:r>
-              <a:rPr lang="en-IN" dirty="0" err="1" smtClean="0"/>
-              <a:t>re.sub</a:t>
-            </a:r>
-            <a:r>
-              <a:rPr lang="en-IN" dirty="0" smtClean="0"/>
-              <a:t>(r'\W', ' ', text)</a:t>
-            </a:r>
-          </a:p>
-          <a:p>
-            <a:r>
-              <a:rPr lang="en-IN" dirty="0" smtClean="0"/>
-              <a:t>    </a:t>
-            </a:r>
-          </a:p>
-          <a:p>
-            <a:r>
-              <a:rPr lang="en-IN" dirty="0" smtClean="0"/>
-              <a:t>    words = </a:t>
-            </a:r>
-            <a:r>
-              <a:rPr lang="en-IN" dirty="0" err="1" smtClean="0"/>
-              <a:t>text.split</a:t>
-            </a:r>
-            <a:r>
-              <a:rPr lang="en-IN" dirty="0" smtClean="0"/>
-              <a:t>()</a:t>
-            </a:r>
-          </a:p>
-          <a:p>
-            <a:r>
-              <a:rPr lang="en-IN" dirty="0" smtClean="0"/>
-              <a:t>    words = [word for word in words if word not in </a:t>
-            </a:r>
-            <a:r>
-              <a:rPr lang="en-IN" dirty="0" err="1" smtClean="0"/>
-              <a:t>stopwords.words</a:t>
-            </a:r>
-            <a:r>
-              <a:rPr lang="en-IN" dirty="0" smtClean="0"/>
-              <a:t>('</a:t>
-            </a:r>
-            <a:r>
-              <a:rPr lang="en-IN" dirty="0" err="1" smtClean="0"/>
-              <a:t>english</a:t>
-            </a:r>
-            <a:r>
-              <a:rPr lang="en-IN" dirty="0" smtClean="0"/>
-              <a:t>')]</a:t>
-            </a:r>
-          </a:p>
-          <a:p>
-            <a:r>
-              <a:rPr lang="en-IN" dirty="0" smtClean="0"/>
-              <a:t>    </a:t>
-            </a:r>
-          </a:p>
-          <a:p>
-            <a:r>
-              <a:rPr lang="en-IN" dirty="0" smtClean="0"/>
-              <a:t>    return " ".join(words)</a:t>
-            </a:r>
+              <a:rPr lang="en-US" dirty="0" smtClean="0"/>
+              <a:t>The workflow of the system:</a:t>
+            </a:r>
+          </a:p>
+          <a:p>
+            <a:r>
+              <a:rPr lang="en-US" dirty="0" smtClean="0"/>
+              <a:t>Resume upload </a:t>
+            </a:r>
+          </a:p>
+          <a:p>
+            <a:r>
+              <a:rPr lang="en-US" dirty="0" smtClean="0"/>
+              <a:t>Text extraction </a:t>
+            </a:r>
+          </a:p>
+          <a:p>
+            <a:r>
+              <a:rPr lang="en-US" dirty="0" smtClean="0"/>
+              <a:t>Data preprocessing </a:t>
+            </a:r>
+          </a:p>
+          <a:p>
+            <a:r>
+              <a:rPr lang="en-US" dirty="0" smtClean="0"/>
+              <a:t>Feature extraction </a:t>
+            </a:r>
+          </a:p>
+          <a:p>
+            <a:r>
+              <a:rPr lang="en-US" dirty="0" smtClean="0"/>
+              <a:t>Model prediction </a:t>
+            </a:r>
+          </a:p>
+          <a:p>
+            <a:r>
+              <a:rPr lang="en-US" dirty="0" smtClean="0"/>
+              <a:t>Ranking </a:t>
+            </a:r>
+          </a:p>
+          <a:p>
+            <a:r>
+              <a:rPr lang="en-US" dirty="0" smtClean="0"/>
+              <a:t>Result display</a:t>
+            </a:r>
+          </a:p>
+          <a:p>
             <a:endParaRPr lang="en-IN" dirty="0"/>
           </a:p>
         </p:txBody>
@@ -5718,7 +5669,7 @@
     </p:spTree>
     <p:extLst>
       <p:ext uri="{BB962C8B-B14F-4D97-AF65-F5344CB8AC3E}">
-        <p14:creationId xmlns:p14="http://schemas.microsoft.com/office/powerpoint/2010/main" val="2204560155"/>
+        <p14:creationId xmlns:p14="http://schemas.microsoft.com/office/powerpoint/2010/main" val="3046940249"/>
       </p:ext>
     </p:extLst>
   </p:cSld>
@@ -5762,7 +5713,7 @@
           <a:p>
             <a:r>
               <a:rPr lang="en-IN" dirty="0" smtClean="0"/>
-              <a:t>Skill Extraction</a:t>
+              <a:t>Advantages</a:t>
             </a:r>
             <a:endParaRPr lang="en-IN" dirty="0"/>
           </a:p>
@@ -5780,118 +5731,39 @@
         </p:nvSpPr>
         <p:spPr/>
         <p:txBody>
-          <a:bodyPr>
-            <a:normAutofit fontScale="92500" lnSpcReduction="20000"/>
-          </a:bodyPr>
-          <a:lstStyle/>
-          <a:p>
-            <a:r>
-              <a:rPr lang="en-IN" dirty="0" err="1" smtClean="0"/>
-              <a:t>skills_list</a:t>
-            </a:r>
-            <a:r>
-              <a:rPr lang="en-IN" dirty="0" smtClean="0"/>
-              <a:t> = ["python", "machine learning", "data science", "java", "</a:t>
-            </a:r>
-            <a:r>
-              <a:rPr lang="en-IN" dirty="0" err="1" smtClean="0"/>
-              <a:t>sql</a:t>
-            </a:r>
-            <a:r>
-              <a:rPr lang="en-IN" dirty="0" smtClean="0"/>
-              <a:t>"]</a:t>
-            </a:r>
-          </a:p>
-          <a:p>
-            <a:endParaRPr lang="en-IN" dirty="0" smtClean="0"/>
-          </a:p>
-          <a:p>
-            <a:r>
-              <a:rPr lang="en-IN" dirty="0" err="1" smtClean="0"/>
-              <a:t>def</a:t>
-            </a:r>
-            <a:r>
-              <a:rPr lang="en-IN" dirty="0" smtClean="0"/>
-              <a:t> </a:t>
-            </a:r>
-            <a:r>
-              <a:rPr lang="en-IN" dirty="0" err="1" smtClean="0"/>
-              <a:t>extract_skills</a:t>
-            </a:r>
-            <a:r>
-              <a:rPr lang="en-IN" dirty="0" smtClean="0"/>
-              <a:t>(text):</a:t>
-            </a:r>
-          </a:p>
-          <a:p>
-            <a:r>
-              <a:rPr lang="en-IN" dirty="0" smtClean="0"/>
-              <a:t>    </a:t>
-            </a:r>
-            <a:r>
-              <a:rPr lang="en-IN" dirty="0" err="1" smtClean="0"/>
-              <a:t>found_skills</a:t>
-            </a:r>
-            <a:r>
-              <a:rPr lang="en-IN" dirty="0" smtClean="0"/>
-              <a:t> = []</a:t>
-            </a:r>
-          </a:p>
-          <a:p>
-            <a:r>
-              <a:rPr lang="en-IN" dirty="0" smtClean="0"/>
-              <a:t>    </a:t>
-            </a:r>
-          </a:p>
-          <a:p>
-            <a:r>
-              <a:rPr lang="en-IN" dirty="0" smtClean="0"/>
-              <a:t>    for skill in </a:t>
-            </a:r>
-            <a:r>
-              <a:rPr lang="en-IN" dirty="0" err="1" smtClean="0"/>
-              <a:t>skills_list</a:t>
-            </a:r>
-            <a:r>
-              <a:rPr lang="en-IN" dirty="0" smtClean="0"/>
-              <a:t>:</a:t>
-            </a:r>
-          </a:p>
-          <a:p>
-            <a:r>
-              <a:rPr lang="en-IN" dirty="0" smtClean="0"/>
-              <a:t>        if skill in text:</a:t>
-            </a:r>
-          </a:p>
-          <a:p>
-            <a:r>
-              <a:rPr lang="en-IN" dirty="0" smtClean="0"/>
-              <a:t>            </a:t>
-            </a:r>
-            <a:r>
-              <a:rPr lang="en-IN" dirty="0" err="1" smtClean="0"/>
-              <a:t>found_skills.append</a:t>
-            </a:r>
-            <a:r>
-              <a:rPr lang="en-IN" dirty="0" smtClean="0"/>
-              <a:t>(skill)</a:t>
-            </a:r>
-          </a:p>
-          <a:p>
-            <a:r>
-              <a:rPr lang="en-IN" dirty="0" smtClean="0"/>
-              <a:t>            </a:t>
-            </a:r>
-          </a:p>
-          <a:p>
-            <a:r>
-              <a:rPr lang="en-IN" dirty="0" smtClean="0"/>
-              <a:t>    return </a:t>
-            </a:r>
-            <a:r>
-              <a:rPr lang="en-IN" dirty="0" err="1" smtClean="0"/>
-              <a:t>found_skills</a:t>
-            </a:r>
+          <a:bodyPr/>
+          <a:lstStyle/>
+          <a:p>
+            <a:r>
+              <a:rPr lang="en-US" dirty="0" smtClean="0"/>
+              <a:t>Saves time </a:t>
+            </a:r>
+          </a:p>
+          <a:p>
+            <a:r>
+              <a:rPr lang="en-US" dirty="0" smtClean="0"/>
+              <a:t>Reduces human bias </a:t>
+            </a:r>
+          </a:p>
+          <a:p>
+            <a:r>
+              <a:rPr lang="en-US" dirty="0" smtClean="0"/>
+              <a:t>Improves accuracy </a:t>
+            </a:r>
+          </a:p>
+          <a:p>
+            <a:r>
+              <a:rPr lang="en-US" dirty="0" smtClean="0"/>
+              <a:t>Handles large data </a:t>
+            </a:r>
+          </a:p>
+          <a:p>
+            <a:r>
+              <a:rPr lang="en-US" dirty="0" smtClean="0"/>
+              <a:t>Cost-effective </a:t>
+            </a:r>
+          </a:p>
+          <a:p>
             <a:endParaRPr lang="en-IN" dirty="0"/>
           </a:p>
         </p:txBody>
@@ -5899,7 +5771,7 @@
     </p:spTree>
     <p:extLst>
       <p:ext uri="{BB962C8B-B14F-4D97-AF65-F5344CB8AC3E}">
-        <p14:creationId xmlns:p14="http://schemas.microsoft.com/office/powerpoint/2010/main" val="2062823802"/>
+        <p14:creationId xmlns:p14="http://schemas.microsoft.com/office/powerpoint/2010/main" val="4000731259"/>
       </p:ext>
     </p:extLst>
   </p:cSld>
@@ -5943,7 +5815,7 @@
           <a:p>
             <a:r>
               <a:rPr lang="en-IN" dirty="0" smtClean="0"/>
-              <a:t>Feature Extraction (TF-IDF)</a:t>
+              <a:t>Limitations</a:t>
             </a:r>
             <a:endParaRPr lang="en-IN" dirty="0"/>
           </a:p>
@@ -5961,90 +5833,33 @@
         </p:nvSpPr>
         <p:spPr/>
         <p:txBody>
-          <a:bodyPr>
-            <a:normAutofit/>
-          </a:bodyPr>
-          <a:lstStyle/>
-          <a:p>
-            <a:r>
-              <a:rPr lang="en-IN" dirty="0" smtClean="0"/>
-              <a:t>from </a:t>
-            </a:r>
-            <a:r>
-              <a:rPr lang="en-IN" dirty="0" err="1" smtClean="0"/>
-              <a:t>sklearn.feature_extraction.text</a:t>
-            </a:r>
-            <a:r>
-              <a:rPr lang="en-IN" dirty="0" smtClean="0"/>
-              <a:t> import </a:t>
-            </a:r>
-            <a:r>
-              <a:rPr lang="en-IN" dirty="0" err="1" smtClean="0"/>
-              <a:t>TfidfVectorizer</a:t>
-            </a:r>
-            <a:endParaRPr lang="en-IN" dirty="0" smtClean="0"/>
-          </a:p>
-          <a:p>
-            <a:endParaRPr lang="en-IN" dirty="0" smtClean="0"/>
-          </a:p>
-          <a:p>
-            <a:r>
-              <a:rPr lang="en-IN" dirty="0" err="1" smtClean="0"/>
-              <a:t>vectorizer</a:t>
-            </a:r>
-            <a:r>
-              <a:rPr lang="en-IN" dirty="0" smtClean="0"/>
-              <a:t> = </a:t>
-            </a:r>
-            <a:r>
-              <a:rPr lang="en-IN" dirty="0" err="1" smtClean="0"/>
-              <a:t>TfidfVectorizer</a:t>
-            </a:r>
-            <a:r>
-              <a:rPr lang="en-IN" dirty="0" smtClean="0"/>
-              <a:t>()</a:t>
-            </a:r>
-          </a:p>
-          <a:p>
-            <a:endParaRPr lang="en-IN" dirty="0" smtClean="0"/>
-          </a:p>
-          <a:p>
-            <a:r>
-              <a:rPr lang="en-IN" dirty="0" err="1" smtClean="0"/>
-              <a:t>def</a:t>
-            </a:r>
-            <a:r>
-              <a:rPr lang="en-IN" dirty="0" smtClean="0"/>
-              <a:t> </a:t>
-            </a:r>
-            <a:r>
-              <a:rPr lang="en-IN" dirty="0" err="1" smtClean="0"/>
-              <a:t>vectorize_text</a:t>
-            </a:r>
-            <a:r>
-              <a:rPr lang="en-IN" dirty="0" smtClean="0"/>
-              <a:t>(resumes):</a:t>
-            </a:r>
-          </a:p>
-          <a:p>
-            <a:r>
-              <a:rPr lang="en-IN" dirty="0" smtClean="0"/>
-              <a:t>    X = </a:t>
-            </a:r>
-            <a:r>
-              <a:rPr lang="en-IN" dirty="0" err="1" smtClean="0"/>
-              <a:t>vectorizer.fit_transform</a:t>
-            </a:r>
-            <a:r>
-              <a:rPr lang="en-IN" dirty="0" smtClean="0"/>
-              <a:t>(resumes)</a:t>
-            </a:r>
-          </a:p>
-          <a:p>
-            <a:r>
-              <a:rPr lang="en-IN" dirty="0" smtClean="0"/>
-              <a:t>    return X</a:t>
-            </a:r>
+          <a:bodyPr/>
+          <a:lstStyle/>
+          <a:p>
+            <a:r>
+              <a:rPr lang="en-US" dirty="0" smtClean="0"/>
+              <a:t>Depends on data quality </a:t>
+            </a:r>
+          </a:p>
+          <a:p>
+            <a:r>
+              <a:rPr lang="en-US" dirty="0" smtClean="0"/>
+              <a:t>May not understand context fully </a:t>
+            </a:r>
+          </a:p>
+          <a:p>
+            <a:r>
+              <a:rPr lang="en-US" dirty="0" smtClean="0"/>
+              <a:t>Requires training data </a:t>
+            </a:r>
+          </a:p>
+          <a:p>
+            <a:r>
+              <a:rPr lang="en-US" dirty="0" smtClean="0"/>
+              <a:t>Limited to predefined skills </a:t>
+            </a:r>
+          </a:p>
+          <a:p>
             <a:endParaRPr lang="en-IN" dirty="0"/>
           </a:p>
         </p:txBody>
@@ -6052,7 +5867,7 @@
     </p:spTree>
     <p:extLst>
       <p:ext uri="{BB962C8B-B14F-4D97-AF65-F5344CB8AC3E}">
-        <p14:creationId xmlns:p14="http://schemas.microsoft.com/office/powerpoint/2010/main" val="3662421780"/>
+        <p14:creationId xmlns:p14="http://schemas.microsoft.com/office/powerpoint/2010/main" val="1382072816"/>
       </p:ext>
     </p:extLst>
   </p:cSld>
@@ -6096,7 +5911,7 @@
           <a:p>
             <a:r>
               <a:rPr lang="en-IN" dirty="0" smtClean="0"/>
-              <a:t>Model Training</a:t>
+              <a:t>Applications</a:t>
             </a:r>
             <a:endParaRPr lang="en-IN" dirty="0"/>
           </a:p>
@@ -6114,142 +5929,30 @@
         </p:nvSpPr>
         <p:spPr/>
         <p:txBody>
-          <a:bodyPr>
-            <a:normAutofit lnSpcReduction="10000"/>
-          </a:bodyPr>
-          <a:lstStyle/>
-          <a:p>
-            <a:r>
-              <a:rPr lang="en-IN" dirty="0" smtClean="0"/>
-              <a:t>from </a:t>
-            </a:r>
-            <a:r>
-              <a:rPr lang="en-IN" dirty="0" err="1" smtClean="0"/>
-              <a:t>sklearn.model_selection</a:t>
-            </a:r>
-            <a:r>
-              <a:rPr lang="en-IN" dirty="0" smtClean="0"/>
-              <a:t> import </a:t>
-            </a:r>
-            <a:r>
-              <a:rPr lang="en-IN" dirty="0" err="1" smtClean="0"/>
-              <a:t>train_test_split</a:t>
-            </a:r>
-            <a:endParaRPr lang="en-IN" dirty="0" smtClean="0"/>
-          </a:p>
-          <a:p>
-            <a:r>
-              <a:rPr lang="en-IN" dirty="0" smtClean="0"/>
-              <a:t>from </a:t>
-            </a:r>
-            <a:r>
-              <a:rPr lang="en-IN" dirty="0" err="1" smtClean="0"/>
-              <a:t>sklearn.linear_model</a:t>
-            </a:r>
-            <a:r>
-              <a:rPr lang="en-IN" dirty="0" smtClean="0"/>
-              <a:t> import </a:t>
-            </a:r>
-            <a:r>
-              <a:rPr lang="en-IN" dirty="0" err="1" smtClean="0"/>
-              <a:t>LogisticRegression</a:t>
-            </a:r>
-            <a:endParaRPr lang="en-IN" dirty="0" smtClean="0"/>
-          </a:p>
-          <a:p>
-            <a:endParaRPr lang="en-IN" dirty="0" smtClean="0"/>
-          </a:p>
-          <a:p>
-            <a:r>
-              <a:rPr lang="en-IN" dirty="0" err="1" smtClean="0"/>
-              <a:t>X_train</a:t>
-            </a:r>
-            <a:r>
-              <a:rPr lang="en-IN" dirty="0" smtClean="0"/>
-              <a:t>, </a:t>
-            </a:r>
-            <a:r>
-              <a:rPr lang="en-IN" dirty="0" err="1" smtClean="0"/>
-              <a:t>X_test</a:t>
-            </a:r>
-            <a:r>
-              <a:rPr lang="en-IN" dirty="0" smtClean="0"/>
-              <a:t>, </a:t>
-            </a:r>
-            <a:r>
-              <a:rPr lang="en-IN" dirty="0" err="1" smtClean="0"/>
-              <a:t>y_train</a:t>
-            </a:r>
-            <a:r>
-              <a:rPr lang="en-IN" dirty="0" smtClean="0"/>
-              <a:t>, </a:t>
-            </a:r>
-            <a:r>
-              <a:rPr lang="en-IN" dirty="0" err="1" smtClean="0"/>
-              <a:t>y_test</a:t>
-            </a:r>
-            <a:r>
-              <a:rPr lang="en-IN" dirty="0" smtClean="0"/>
-              <a:t> = </a:t>
-            </a:r>
-            <a:r>
-              <a:rPr lang="en-IN" dirty="0" err="1" smtClean="0"/>
-              <a:t>train_test_split</a:t>
-            </a:r>
-            <a:r>
-              <a:rPr lang="en-IN" dirty="0" smtClean="0"/>
-              <a:t>(X, y, </a:t>
-            </a:r>
-            <a:r>
-              <a:rPr lang="en-IN" dirty="0" err="1" smtClean="0"/>
-              <a:t>test_size</a:t>
-            </a:r>
-            <a:r>
-              <a:rPr lang="en-IN" dirty="0" smtClean="0"/>
-              <a:t>=0.2)</a:t>
-            </a:r>
-          </a:p>
-          <a:p>
-            <a:endParaRPr lang="en-IN" dirty="0" smtClean="0"/>
-          </a:p>
-          <a:p>
-            <a:r>
-              <a:rPr lang="en-IN" dirty="0" smtClean="0"/>
-              <a:t>model = </a:t>
-            </a:r>
-            <a:r>
-              <a:rPr lang="en-IN" dirty="0" err="1" smtClean="0"/>
-              <a:t>LogisticRegression</a:t>
-            </a:r>
-            <a:r>
-              <a:rPr lang="en-IN" dirty="0" smtClean="0"/>
-              <a:t>()</a:t>
-            </a:r>
-          </a:p>
-          <a:p>
-            <a:r>
-              <a:rPr lang="en-IN" dirty="0" err="1" smtClean="0"/>
-              <a:t>model.fit</a:t>
-            </a:r>
-            <a:r>
-              <a:rPr lang="en-IN" dirty="0" smtClean="0"/>
-              <a:t>(</a:t>
-            </a:r>
-            <a:r>
-              <a:rPr lang="en-IN" dirty="0" err="1" smtClean="0"/>
-              <a:t>X_train</a:t>
-            </a:r>
-            <a:r>
-              <a:rPr lang="en-IN" dirty="0" smtClean="0"/>
-              <a:t>, </a:t>
-            </a:r>
-            <a:r>
-              <a:rPr lang="en-IN" dirty="0" err="1" smtClean="0"/>
-              <a:t>y_train</a:t>
-            </a:r>
-            <a:r>
-              <a:rPr lang="en-IN" dirty="0" smtClean="0"/>
-              <a:t>)</a:t>
+          <a:bodyPr/>
+          <a:lstStyle/>
+          <a:p>
+            <a:r>
+              <a:rPr lang="en-US" dirty="0" smtClean="0"/>
+              <a:t>Corporate hiring </a:t>
+            </a:r>
+          </a:p>
+          <a:p>
+            <a:r>
+              <a:rPr lang="en-US" dirty="0" smtClean="0"/>
+              <a:t>Recruitment agencies </a:t>
+            </a:r>
+          </a:p>
+          <a:p>
+            <a:r>
+              <a:rPr lang="en-US" dirty="0" smtClean="0"/>
+              <a:t>Campus placements </a:t>
+            </a:r>
+          </a:p>
+          <a:p>
+            <a:r>
+              <a:rPr lang="en-US" dirty="0" smtClean="0"/>
+              <a:t>Job portals</a:t>
             </a:r>
             <a:endParaRPr lang="en-IN" dirty="0"/>
           </a:p>
@@ -6258,7 +5961,7 @@
     </p:spTree>
     <p:extLst>
       <p:ext uri="{BB962C8B-B14F-4D97-AF65-F5344CB8AC3E}">
-        <p14:creationId xmlns:p14="http://schemas.microsoft.com/office/powerpoint/2010/main" val="1137611807"/>
+        <p14:creationId xmlns:p14="http://schemas.microsoft.com/office/powerpoint/2010/main" val="615434591"/>
       </p:ext>
     </p:extLst>
   </p:cSld>
@@ -6302,7 +6005,7 @@
           <a:p>
             <a:r>
               <a:rPr lang="en-IN" dirty="0" smtClean="0"/>
-              <a:t>Resume Matching Score</a:t>
+              <a:t>Future Scope</a:t>
             </a:r>
             <a:endParaRPr lang="en-IN" dirty="0"/>
           </a:p>
@@ -6320,98 +6023,40 @@
         </p:nvSpPr>
         <p:spPr/>
         <p:txBody>
-          <a:bodyPr>
-            <a:normAutofit/>
-          </a:bodyPr>
-          <a:lstStyle/>
-          <a:p>
-            <a:r>
-              <a:rPr lang="en-IN" dirty="0" smtClean="0"/>
-              <a:t>from </a:t>
-            </a:r>
-            <a:r>
-              <a:rPr lang="en-IN" dirty="0" err="1" smtClean="0"/>
-              <a:t>sklearn.metrics.pairwise</a:t>
-            </a:r>
-            <a:r>
-              <a:rPr lang="en-IN" dirty="0" smtClean="0"/>
-              <a:t> import </a:t>
-            </a:r>
-            <a:r>
-              <a:rPr lang="en-IN" dirty="0" err="1" smtClean="0"/>
-              <a:t>cosine_similarity</a:t>
-            </a:r>
-            <a:endParaRPr lang="en-IN" dirty="0" smtClean="0"/>
-          </a:p>
-          <a:p>
-            <a:endParaRPr lang="en-IN" dirty="0" smtClean="0"/>
-          </a:p>
-          <a:p>
-            <a:r>
-              <a:rPr lang="en-IN" dirty="0" err="1" smtClean="0"/>
-              <a:t>def</a:t>
-            </a:r>
-            <a:r>
-              <a:rPr lang="en-IN" dirty="0" smtClean="0"/>
-              <a:t> </a:t>
-            </a:r>
-            <a:r>
-              <a:rPr lang="en-IN" dirty="0" err="1" smtClean="0"/>
-              <a:t>match_score</a:t>
-            </a:r>
-            <a:r>
-              <a:rPr lang="en-IN" dirty="0" smtClean="0"/>
-              <a:t>(</a:t>
-            </a:r>
-            <a:r>
-              <a:rPr lang="en-IN" dirty="0" err="1" smtClean="0"/>
-              <a:t>job_desc</a:t>
-            </a:r>
-            <a:r>
-              <a:rPr lang="en-IN" dirty="0" smtClean="0"/>
-              <a:t>, resume):</a:t>
-            </a:r>
-          </a:p>
-          <a:p>
-            <a:r>
-              <a:rPr lang="en-IN" dirty="0" smtClean="0"/>
-              <a:t>    vectors = </a:t>
-            </a:r>
-            <a:r>
-              <a:rPr lang="en-IN" dirty="0" err="1" smtClean="0"/>
-              <a:t>vectorizer.transform</a:t>
-            </a:r>
-            <a:r>
-              <a:rPr lang="en-IN" dirty="0" smtClean="0"/>
-              <a:t>([</a:t>
-            </a:r>
-            <a:r>
-              <a:rPr lang="en-IN" dirty="0" err="1" smtClean="0"/>
-              <a:t>job_desc</a:t>
-            </a:r>
-            <a:r>
-              <a:rPr lang="en-IN" dirty="0" smtClean="0"/>
-              <a:t>, resume])</a:t>
-            </a:r>
-          </a:p>
-          <a:p>
-            <a:r>
-              <a:rPr lang="en-IN" dirty="0" smtClean="0"/>
-              <a:t>    score = </a:t>
-            </a:r>
-            <a:r>
-              <a:rPr lang="en-IN" dirty="0" err="1" smtClean="0"/>
-              <a:t>cosine_similarity</a:t>
-            </a:r>
-            <a:r>
-              <a:rPr lang="en-IN" dirty="0" smtClean="0"/>
-              <a:t>(vectors[0], vectors[1])</a:t>
-            </a:r>
-          </a:p>
-          <a:p>
-            <a:r>
-              <a:rPr lang="en-IN" dirty="0" smtClean="0"/>
-              <a:t>    return score[0][0]</a:t>
+          <a:bodyPr/>
+          <a:lstStyle/>
+          <a:p>
+            <a:r>
+              <a:rPr lang="en-US" dirty="0" smtClean="0"/>
+              <a:t>Integration with job portals </a:t>
+            </a:r>
+          </a:p>
+          <a:p>
+            <a:r>
+              <a:rPr lang="en-US" dirty="0" smtClean="0"/>
+              <a:t>Deep learning models </a:t>
+            </a:r>
+          </a:p>
+          <a:p>
+            <a:r>
+              <a:rPr lang="en-US" dirty="0" smtClean="0"/>
+              <a:t>Real-time analytics </a:t>
+            </a:r>
+          </a:p>
+          <a:p>
+            <a:r>
+              <a:rPr lang="en-US" dirty="0" err="1" smtClean="0"/>
+              <a:t>Chatbot</a:t>
+            </a:r>
+            <a:r>
+              <a:rPr lang="en-US" dirty="0" smtClean="0"/>
+              <a:t> integration </a:t>
+            </a:r>
+          </a:p>
+          <a:p>
+            <a:r>
+              <a:rPr lang="en-US" dirty="0" smtClean="0"/>
+              <a:t>Resume recommendation system</a:t>
             </a:r>
             <a:endParaRPr lang="en-IN" dirty="0"/>
           </a:p>
@@ -6420,7 +6065,7 @@
     </p:spTree>
     <p:extLst>
       <p:ext uri="{BB962C8B-B14F-4D97-AF65-F5344CB8AC3E}">
-        <p14:creationId xmlns:p14="http://schemas.microsoft.com/office/powerpoint/2010/main" val="4193556206"/>
+        <p14:creationId xmlns:p14="http://schemas.microsoft.com/office/powerpoint/2010/main" val="1864947110"/>
       </p:ext>
     </p:extLst>
   </p:cSld>
@@ -6464,7 +6109,7 @@
           <a:p>
             <a:r>
               <a:rPr lang="en-IN" dirty="0" smtClean="0"/>
-              <a:t>Candidate Ranking</a:t>
+              <a:t>Conclusion</a:t>
             </a:r>
             <a:endParaRPr lang="en-IN" dirty="0"/>
           </a:p>
@@ -6482,63 +6127,21 @@
         </p:nvSpPr>
         <p:spPr/>
         <p:txBody>
-          <a:bodyPr>
-            <a:normAutofit fontScale="92500" lnSpcReduction="20000"/>
-          </a:bodyPr>
-          <a:lstStyle/>
-          <a:p>
-            <a:r>
-              <a:rPr lang="en-US" dirty="0" smtClean="0"/>
-              <a:t>candidates = [</a:t>
-            </a:r>
-          </a:p>
-          <a:p>
-            <a:r>
-              <a:rPr lang="en-US" dirty="0" smtClean="0"/>
-              <a:t>    {"name": "A", "score": 0.85},</a:t>
-            </a:r>
-          </a:p>
-          <a:p>
-            <a:r>
-              <a:rPr lang="en-US" dirty="0" smtClean="0"/>
-              <a:t>    {"name": "B", "score": 0.65},</a:t>
-            </a:r>
-          </a:p>
-          <a:p>
-            <a:r>
-              <a:rPr lang="en-US" dirty="0" smtClean="0"/>
-              <a:t>    {"name": "C", "score": 0.92}</a:t>
-            </a:r>
-          </a:p>
-          <a:p>
-            <a:r>
-              <a:rPr lang="en-US" dirty="0" smtClean="0"/>
-              <a:t>]</a:t>
-            </a:r>
-          </a:p>
-          <a:p>
-            <a:endParaRPr lang="en-US" dirty="0" smtClean="0"/>
-          </a:p>
-          <a:p>
-            <a:r>
-              <a:rPr lang="en-US" dirty="0" smtClean="0"/>
-              <a:t>ranked = sorted(candidates, key=lambda x: x['score'], reverse=True)</a:t>
-            </a:r>
-          </a:p>
-          <a:p>
-            <a:endParaRPr lang="en-US" dirty="0" smtClean="0"/>
-          </a:p>
-          <a:p>
-            <a:r>
-              <a:rPr lang="en-US" dirty="0" smtClean="0"/>
-              <a:t>for c in ranked:</a:t>
-            </a:r>
-          </a:p>
-          <a:p>
-            <a:r>
-              <a:rPr lang="en-US" dirty="0" smtClean="0"/>
-              <a:t>    print(c)</a:t>
-            </a:r>
+          <a:bodyPr/>
+          <a:lstStyle/>
+          <a:p>
+            <a:r>
+              <a:rPr lang="en-US" dirty="0" smtClean="0"/>
+              <a:t>The AI-Based Recruitment and Resume Screening Application provides an efficient and intelligent solution to modern recruitment challenges.</a:t>
+            </a:r>
+          </a:p>
+          <a:p>
+            <a:r>
+              <a:rPr lang="en-US" dirty="0" smtClean="0"/>
+              <a:t>It reduces manual effort, improves accuracy, and ensures fair candidate evaluation. With further enhancements, it can become a powerful tool for organizations worldwide.</a:t>
+            </a:r>
+          </a:p>
+          <a:p>
             <a:endParaRPr lang="en-IN" dirty="0"/>
           </a:p>
         </p:txBody>
@@ -6546,7 +6149,7 @@
     </p:spTree>
     <p:extLst>
       <p:ext uri="{BB962C8B-B14F-4D97-AF65-F5344CB8AC3E}">
-        <p14:creationId xmlns:p14="http://schemas.microsoft.com/office/powerpoint/2010/main" val="3634616223"/>
+        <p14:creationId xmlns:p14="http://schemas.microsoft.com/office/powerpoint/2010/main" val="1405452821"/>
       </p:ext>
     </p:extLst>
   </p:cSld>
@@ -6585,12 +6188,14 @@
         </p:nvSpPr>
         <p:spPr/>
         <p:txBody>
-          <a:bodyPr/>
-          <a:lstStyle/>
-          <a:p>
-            <a:r>
-              <a:rPr lang="en-IN" dirty="0" smtClean="0"/>
-              <a:t>Output Example</a:t>
+          <a:bodyPr>
+            <a:normAutofit/>
+          </a:bodyPr>
+          <a:lstStyle/>
+          <a:p>
+            <a:r>
+              <a:rPr lang="en-IN" dirty="0" smtClean="0"/>
+              <a:t>Resume Upload &amp; Text Extraction</a:t>
             </a:r>
             <a:endParaRPr lang="en-IN" dirty="0"/>
           </a:p>
@@ -6608,24 +6213,101 @@
         </p:nvSpPr>
         <p:spPr/>
         <p:txBody>
-          <a:bodyPr/>
-          <a:lstStyle/>
-          <a:p>
-            <a:r>
-              <a:rPr lang="en-IN" dirty="0" smtClean="0"/>
-              <a:t>Resume 1 → Score: 0.92  </a:t>
-            </a:r>
-          </a:p>
-          <a:p>
-            <a:r>
-              <a:rPr lang="en-IN" dirty="0" smtClean="0"/>
-              <a:t>Resume 2 → Score: 0.85  </a:t>
-            </a:r>
-          </a:p>
-          <a:p>
-            <a:r>
-              <a:rPr lang="en-IN" dirty="0" smtClean="0"/>
-              <a:t>Resume 3 → Score: 0.65 </a:t>
+          <a:bodyPr>
+            <a:normAutofit lnSpcReduction="10000"/>
+          </a:bodyPr>
+          <a:lstStyle/>
+          <a:p>
+            <a:r>
+              <a:rPr lang="en-IN" dirty="0" smtClean="0"/>
+              <a:t>import PyPDF2</a:t>
+            </a:r>
+          </a:p>
+          <a:p>
+            <a:endParaRPr lang="en-IN" dirty="0" smtClean="0"/>
+          </a:p>
+          <a:p>
+            <a:r>
+              <a:rPr lang="en-IN" dirty="0" err="1" smtClean="0"/>
+              <a:t>def</a:t>
+            </a:r>
+            <a:r>
+              <a:rPr lang="en-IN" dirty="0" smtClean="0"/>
+              <a:t> </a:t>
+            </a:r>
+            <a:r>
+              <a:rPr lang="en-IN" dirty="0" err="1" smtClean="0"/>
+              <a:t>extract_text_from_pdf</a:t>
+            </a:r>
+            <a:r>
+              <a:rPr lang="en-IN" dirty="0" smtClean="0"/>
+              <a:t>(file):</a:t>
+            </a:r>
+          </a:p>
+          <a:p>
+            <a:r>
+              <a:rPr lang="en-IN" dirty="0" smtClean="0"/>
+              <a:t>    text = ""</a:t>
+            </a:r>
+          </a:p>
+          <a:p>
+            <a:r>
+              <a:rPr lang="en-IN" dirty="0" smtClean="0"/>
+              <a:t>    </a:t>
+            </a:r>
+            <a:r>
+              <a:rPr lang="en-IN" dirty="0" err="1" smtClean="0"/>
+              <a:t>pdf_reader</a:t>
+            </a:r>
+            <a:r>
+              <a:rPr lang="en-IN" dirty="0" smtClean="0"/>
+              <a:t> = PyPDF2.PdfReader(file)</a:t>
+            </a:r>
+          </a:p>
+          <a:p>
+            <a:r>
+              <a:rPr lang="en-IN" dirty="0" smtClean="0"/>
+              <a:t>    </a:t>
+            </a:r>
+          </a:p>
+          <a:p>
+            <a:r>
+              <a:rPr lang="en-IN" dirty="0" smtClean="0"/>
+              <a:t>    for page in </a:t>
+            </a:r>
+            <a:r>
+              <a:rPr lang="en-IN" dirty="0" err="1" smtClean="0"/>
+              <a:t>pdf_reader.pages</a:t>
+            </a:r>
+            <a:r>
+              <a:rPr lang="en-IN" dirty="0" smtClean="0"/>
+              <a:t>:</a:t>
+            </a:r>
+          </a:p>
+          <a:p>
+            <a:r>
+              <a:rPr lang="en-IN" dirty="0" smtClean="0"/>
+              <a:t>        text += </a:t>
+            </a:r>
+            <a:r>
+              <a:rPr lang="en-IN" dirty="0" err="1" smtClean="0"/>
+              <a:t>page.extract_text</a:t>
+            </a:r>
+            <a:r>
+              <a:rPr lang="en-IN" dirty="0" smtClean="0"/>
+              <a:t>()</a:t>
+            </a:r>
+          </a:p>
+          <a:p>
+            <a:r>
+              <a:rPr lang="en-IN" dirty="0" smtClean="0"/>
+              <a:t>        </a:t>
+            </a:r>
+          </a:p>
+          <a:p>
+            <a:r>
+              <a:rPr lang="en-IN" dirty="0" smtClean="0"/>
+              <a:t>    return text</a:t>
             </a:r>
             <a:endParaRPr lang="en-IN" dirty="0"/>
           </a:p>
@@ -6634,7 +6316,7 @@
     </p:spTree>
     <p:extLst>
       <p:ext uri="{BB962C8B-B14F-4D97-AF65-F5344CB8AC3E}">
-        <p14:creationId xmlns:p14="http://schemas.microsoft.com/office/powerpoint/2010/main" val="722148785"/>
+        <p14:creationId xmlns:p14="http://schemas.microsoft.com/office/powerpoint/2010/main" val="947341881"/>
       </p:ext>
     </p:extLst>
   </p:cSld>
@@ -6678,7 +6360,11 @@
           <a:p>
             <a:r>
               <a:rPr lang="en-IN" dirty="0" smtClean="0"/>
-              <a:t>References</a:t>
+              <a:t>Data </a:t>
+            </a:r>
+            <a:r>
+              <a:rPr lang="en-IN" dirty="0" err="1" smtClean="0"/>
+              <a:t>Preprocessing</a:t>
             </a:r>
             <a:endParaRPr lang="en-IN" dirty="0"/>
           </a:p>
@@ -6696,24 +6382,168 @@
         </p:nvSpPr>
         <p:spPr/>
         <p:txBody>
-          <a:bodyPr/>
-          <a:lstStyle/>
-          <a:p>
-            <a:r>
-              <a:rPr lang="en-US" dirty="0" smtClean="0"/>
-              <a:t>Research papers on AI in recruitment </a:t>
-            </a:r>
-          </a:p>
-          <a:p>
-            <a:r>
-              <a:rPr lang="en-US" dirty="0" smtClean="0"/>
-              <a:t>NLP documentation </a:t>
-            </a:r>
-          </a:p>
-          <a:p>
-            <a:r>
-              <a:rPr lang="en-US" dirty="0" smtClean="0"/>
-              <a:t>Machine learning resources</a:t>
+          <a:bodyPr>
+            <a:normAutofit fontScale="70000" lnSpcReduction="20000"/>
+          </a:bodyPr>
+          <a:lstStyle/>
+          <a:p>
+            <a:r>
+              <a:rPr lang="en-IN" dirty="0" smtClean="0"/>
+              <a:t>import re</a:t>
+            </a:r>
+          </a:p>
+          <a:p>
+            <a:r>
+              <a:rPr lang="en-IN" dirty="0" smtClean="0"/>
+              <a:t>import </a:t>
+            </a:r>
+            <a:r>
+              <a:rPr lang="en-IN" dirty="0" err="1" smtClean="0"/>
+              <a:t>nltk</a:t>
+            </a:r>
+            <a:endParaRPr lang="en-IN" dirty="0" smtClean="0"/>
+          </a:p>
+          <a:p>
+            <a:r>
+              <a:rPr lang="en-IN" dirty="0" smtClean="0"/>
+              <a:t>from </a:t>
+            </a:r>
+            <a:r>
+              <a:rPr lang="en-IN" dirty="0" err="1" smtClean="0"/>
+              <a:t>nltk.corpus</a:t>
+            </a:r>
+            <a:r>
+              <a:rPr lang="en-IN" dirty="0" smtClean="0"/>
+              <a:t> import </a:t>
+            </a:r>
+            <a:r>
+              <a:rPr lang="en-IN" dirty="0" err="1" smtClean="0"/>
+              <a:t>stopwords</a:t>
+            </a:r>
+            <a:endParaRPr lang="en-IN" dirty="0" smtClean="0"/>
+          </a:p>
+          <a:p>
+            <a:endParaRPr lang="en-IN" dirty="0" smtClean="0"/>
+          </a:p>
+          <a:p>
+            <a:r>
+              <a:rPr lang="en-IN" dirty="0" err="1" smtClean="0"/>
+              <a:t>nltk.download</a:t>
+            </a:r>
+            <a:r>
+              <a:rPr lang="en-IN" dirty="0" smtClean="0"/>
+              <a:t>('</a:t>
+            </a:r>
+            <a:r>
+              <a:rPr lang="en-IN" dirty="0" err="1" smtClean="0"/>
+              <a:t>stopwords</a:t>
+            </a:r>
+            <a:r>
+              <a:rPr lang="en-IN" dirty="0" smtClean="0"/>
+              <a:t>')</a:t>
+            </a:r>
+          </a:p>
+          <a:p>
+            <a:endParaRPr lang="en-IN" dirty="0" smtClean="0"/>
+          </a:p>
+          <a:p>
+            <a:r>
+              <a:rPr lang="en-IN" dirty="0" err="1" smtClean="0"/>
+              <a:t>def</a:t>
+            </a:r>
+            <a:r>
+              <a:rPr lang="en-IN" dirty="0" smtClean="0"/>
+              <a:t> </a:t>
+            </a:r>
+            <a:r>
+              <a:rPr lang="en-IN" dirty="0" err="1" smtClean="0"/>
+              <a:t>preprocess_text</a:t>
+            </a:r>
+            <a:r>
+              <a:rPr lang="en-IN" dirty="0" smtClean="0"/>
+              <a:t>(text):</a:t>
+            </a:r>
+          </a:p>
+          <a:p>
+            <a:r>
+              <a:rPr lang="en-IN" dirty="0" smtClean="0"/>
+              <a:t>    text = </a:t>
+            </a:r>
+            <a:r>
+              <a:rPr lang="en-IN" dirty="0" err="1" smtClean="0"/>
+              <a:t>text.lower</a:t>
+            </a:r>
+            <a:r>
+              <a:rPr lang="en-IN" dirty="0" smtClean="0"/>
+              <a:t>()</a:t>
+            </a:r>
+          </a:p>
+          <a:p>
+            <a:r>
+              <a:rPr lang="en-IN" dirty="0" smtClean="0"/>
+              <a:t>    text = </a:t>
+            </a:r>
+            <a:r>
+              <a:rPr lang="en-IN" dirty="0" err="1" smtClean="0"/>
+              <a:t>re.sub</a:t>
+            </a:r>
+            <a:r>
+              <a:rPr lang="en-IN" dirty="0" smtClean="0"/>
+              <a:t>(r'\W', ' ', text)</a:t>
+            </a:r>
+          </a:p>
+          <a:p>
+            <a:r>
+              <a:rPr lang="en-IN" dirty="0" smtClean="0"/>
+              <a:t>    </a:t>
+            </a:r>
+          </a:p>
+          <a:p>
+            <a:r>
+              <a:rPr lang="en-IN" dirty="0" smtClean="0"/>
+              <a:t>    words = </a:t>
+            </a:r>
+            <a:r>
+              <a:rPr lang="en-IN" dirty="0" err="1" smtClean="0"/>
+              <a:t>text.split</a:t>
+            </a:r>
+            <a:r>
+              <a:rPr lang="en-IN" dirty="0" smtClean="0"/>
+              <a:t>()</a:t>
+            </a:r>
+          </a:p>
+          <a:p>
+            <a:r>
+              <a:rPr lang="en-IN" dirty="0" smtClean="0"/>
+              <a:t>    words = [word for word in words if word not in </a:t>
+            </a:r>
+            <a:r>
+              <a:rPr lang="en-IN" dirty="0" err="1" smtClean="0"/>
+              <a:t>stopwords.words</a:t>
+            </a:r>
+            <a:r>
+              <a:rPr lang="en-IN" dirty="0" smtClean="0"/>
+              <a:t>('</a:t>
+            </a:r>
+            <a:r>
+              <a:rPr lang="en-IN" dirty="0" err="1" smtClean="0"/>
+              <a:t>english</a:t>
+            </a:r>
+            <a:r>
+              <a:rPr lang="en-IN" dirty="0" smtClean="0"/>
+              <a:t>')]</a:t>
+            </a:r>
+          </a:p>
+          <a:p>
+            <a:r>
+              <a:rPr lang="en-IN" dirty="0" smtClean="0"/>
+              <a:t>    </a:t>
+            </a:r>
+          </a:p>
+          <a:p>
+            <a:r>
+              <a:rPr lang="en-IN" dirty="0" smtClean="0"/>
+              <a:t>    return " ".join(words)</a:t>
             </a:r>
             <a:endParaRPr lang="en-IN" dirty="0"/>
           </a:p>
@@ -6722,7 +6552,7 @@
     </p:spTree>
     <p:extLst>
       <p:ext uri="{BB962C8B-B14F-4D97-AF65-F5344CB8AC3E}">
-        <p14:creationId xmlns:p14="http://schemas.microsoft.com/office/powerpoint/2010/main" val="3874796558"/>
+        <p14:creationId xmlns:p14="http://schemas.microsoft.com/office/powerpoint/2010/main" val="2204560155"/>
       </p:ext>
     </p:extLst>
   </p:cSld>
@@ -6761,63 +6591,141 @@
         </p:nvSpPr>
         <p:spPr/>
         <p:txBody>
+          <a:bodyPr/>
+          <a:lstStyle/>
+          <a:p>
+            <a:r>
+              <a:rPr lang="en-IN" dirty="0" smtClean="0"/>
+              <a:t>Skill Extraction</a:t>
+            </a:r>
+            <a:endParaRPr lang="en-IN" dirty="0"/>
+          </a:p>
+        </p:txBody>
+      </p:sp>
+      <p:sp>
+        <p:nvSpPr>
+          <p:cNvPr id="3" name="Content Placeholder 2"/>
+          <p:cNvSpPr>
+            <a:spLocks noGrp="1"/>
+          </p:cNvSpPr>
+          <p:nvPr>
+            <p:ph idx="1"/>
+          </p:nvPr>
+        </p:nvSpPr>
+        <p:spPr/>
+        <p:txBody>
           <a:bodyPr>
-            <a:normAutofit fontScale="90000"/>
+            <a:normAutofit fontScale="92500" lnSpcReduction="20000"/>
           </a:bodyPr>
           <a:lstStyle/>
           <a:p>
             <a:r>
-              <a:rPr lang="en-US" dirty="0" smtClean="0"/>
-              <a:t>Presented by </a:t>
-            </a:r>
-            <a:r>
-              <a:rPr lang="en-US" dirty="0" err="1"/>
-              <a:t>R</a:t>
-            </a:r>
-            <a:r>
-              <a:rPr lang="en-US" dirty="0" err="1" smtClean="0"/>
-              <a:t>ajat</a:t>
-            </a:r>
-            <a:r>
-              <a:rPr lang="en-US" dirty="0" smtClean="0"/>
+              <a:rPr lang="en-IN" dirty="0" err="1" smtClean="0"/>
+              <a:t>skills_list</a:t>
+            </a:r>
+            <a:r>
+              <a:rPr lang="en-IN" dirty="0" smtClean="0"/>
+              <a:t> = ["python", "machine learning", "data science", "java", "</a:t>
+            </a:r>
+            <a:r>
+              <a:rPr lang="en-IN" dirty="0" err="1" smtClean="0"/>
+              <a:t>sql</a:t>
+            </a:r>
+            <a:r>
+              <a:rPr lang="en-IN" dirty="0" smtClean="0"/>
+              <a:t>"]</a:t>
+            </a:r>
+          </a:p>
+          <a:p>
+            <a:endParaRPr lang="en-IN" dirty="0" smtClean="0"/>
+          </a:p>
+          <a:p>
+            <a:r>
+              <a:rPr lang="en-IN" dirty="0" err="1" smtClean="0"/>
+              <a:t>def</a:t>
+            </a:r>
+            <a:r>
+              <a:rPr lang="en-IN" dirty="0" smtClean="0"/>
               <a:t> </a:t>
             </a:r>
             <a:r>
-              <a:rPr lang="en-US" dirty="0" err="1" smtClean="0"/>
-              <a:t>Chauhan</a:t>
-            </a:r>
-            <a:r>
-              <a:rPr lang="en-US" dirty="0" smtClean="0"/>
-              <a:t/>
-            </a:r>
-            <a:br>
-              <a:rPr lang="en-US" dirty="0" smtClean="0"/>
-            </a:br>
-            <a:endParaRPr lang="en-IN" dirty="0"/>
-          </a:p>
-        </p:txBody>
-      </p:sp>
-      <p:sp>
-        <p:nvSpPr>
-          <p:cNvPr id="3" name="Content Placeholder 2"/>
-          <p:cNvSpPr>
-            <a:spLocks noGrp="1"/>
-          </p:cNvSpPr>
-          <p:nvPr>
-            <p:ph idx="1"/>
-          </p:nvPr>
-        </p:nvSpPr>
-        <p:spPr/>
-        <p:txBody>
-          <a:bodyPr/>
-          <a:lstStyle/>
-          <a:p>
-            <a:r>
-              <a:rPr lang="en-US" dirty="0" smtClean="0"/>
-              <a:t>Thank you </a:t>
-            </a:r>
-          </a:p>
-          <a:p>
+              <a:rPr lang="en-IN" dirty="0" err="1" smtClean="0"/>
+              <a:t>extract_skills</a:t>
+            </a:r>
+            <a:r>
+              <a:rPr lang="en-IN" dirty="0" smtClean="0"/>
+              <a:t>(text):</a:t>
+            </a:r>
+          </a:p>
+          <a:p>
+            <a:r>
+              <a:rPr lang="en-IN" dirty="0" smtClean="0"/>
+              <a:t>    </a:t>
+            </a:r>
+            <a:r>
+              <a:rPr lang="en-IN" dirty="0" err="1" smtClean="0"/>
+              <a:t>found_skills</a:t>
+            </a:r>
+            <a:r>
+              <a:rPr lang="en-IN" dirty="0" smtClean="0"/>
+              <a:t> = []</a:t>
+            </a:r>
+          </a:p>
+          <a:p>
+            <a:r>
+              <a:rPr lang="en-IN" dirty="0" smtClean="0"/>
+              <a:t>    </a:t>
+            </a:r>
+          </a:p>
+          <a:p>
+            <a:r>
+              <a:rPr lang="en-IN" dirty="0" smtClean="0"/>
+              <a:t>    for skill in </a:t>
+            </a:r>
+            <a:r>
+              <a:rPr lang="en-IN" dirty="0" err="1" smtClean="0"/>
+              <a:t>skills_list</a:t>
+            </a:r>
+            <a:r>
+              <a:rPr lang="en-IN" dirty="0" smtClean="0"/>
+              <a:t>:</a:t>
+            </a:r>
+          </a:p>
+          <a:p>
+            <a:r>
+              <a:rPr lang="en-IN" dirty="0" smtClean="0"/>
+              <a:t>        if skill in text:</a:t>
+            </a:r>
+          </a:p>
+          <a:p>
+            <a:r>
+              <a:rPr lang="en-IN" dirty="0" smtClean="0"/>
+              <a:t>            </a:t>
+            </a:r>
+            <a:r>
+              <a:rPr lang="en-IN" dirty="0" err="1" smtClean="0"/>
+              <a:t>found_skills.append</a:t>
+            </a:r>
+            <a:r>
+              <a:rPr lang="en-IN" dirty="0" smtClean="0"/>
+              <a:t>(skill)</a:t>
+            </a:r>
+          </a:p>
+          <a:p>
+            <a:r>
+              <a:rPr lang="en-IN" dirty="0" smtClean="0"/>
+              <a:t>            </a:t>
+            </a:r>
+          </a:p>
+          <a:p>
+            <a:r>
+              <a:rPr lang="en-IN" dirty="0" smtClean="0"/>
+              <a:t>    return </a:t>
+            </a:r>
+            <a:r>
+              <a:rPr lang="en-IN" dirty="0" err="1" smtClean="0"/>
+              <a:t>found_skills</a:t>
+            </a:r>
             <a:endParaRPr lang="en-IN" dirty="0"/>
           </a:p>
         </p:txBody>
@@ -6825,7 +6733,7 @@
     </p:spTree>
     <p:extLst>
       <p:ext uri="{BB962C8B-B14F-4D97-AF65-F5344CB8AC3E}">
-        <p14:creationId xmlns:p14="http://schemas.microsoft.com/office/powerpoint/2010/main" val="1521425124"/>
+        <p14:creationId xmlns:p14="http://schemas.microsoft.com/office/powerpoint/2010/main" val="2062823802"/>
       </p:ext>
     </p:extLst>
   </p:cSld>
@@ -6942,6 +6850,829 @@
     <p:extLst>
       <p:ext uri="{BB962C8B-B14F-4D97-AF65-F5344CB8AC3E}">
         <p14:creationId xmlns:p14="http://schemas.microsoft.com/office/powerpoint/2010/main" val="3291594891"/>
+      </p:ext>
+    </p:extLst>
+  </p:cSld>
+  <p:clrMapOvr>
+    <a:masterClrMapping/>
+  </p:clrMapOvr>
+</p:sld>
+</file>
+
+<file path=ppt/slides/slide30.xml><?xml version="1.0" encoding="utf-8"?>
+<p:sld xmlns:a="http://schemas.openxmlformats.org/drawingml/2006/main" xmlns:r="http://schemas.openxmlformats.org/officeDocument/2006/relationships" xmlns:p="http://schemas.openxmlformats.org/presentationml/2006/main">
+  <p:cSld>
+    <p:spTree>
+      <p:nvGrpSpPr>
+        <p:cNvPr id="1" name=""/>
+        <p:cNvGrpSpPr/>
+        <p:nvPr/>
+      </p:nvGrpSpPr>
+      <p:grpSpPr>
+        <a:xfrm>
+          <a:off x="0" y="0"/>
+          <a:ext cx="0" cy="0"/>
+          <a:chOff x="0" y="0"/>
+          <a:chExt cx="0" cy="0"/>
+        </a:xfrm>
+      </p:grpSpPr>
+      <p:sp>
+        <p:nvSpPr>
+          <p:cNvPr id="2" name="Title 1"/>
+          <p:cNvSpPr>
+            <a:spLocks noGrp="1"/>
+          </p:cNvSpPr>
+          <p:nvPr>
+            <p:ph type="title"/>
+          </p:nvPr>
+        </p:nvSpPr>
+        <p:spPr/>
+        <p:txBody>
+          <a:bodyPr/>
+          <a:lstStyle/>
+          <a:p>
+            <a:r>
+              <a:rPr lang="en-IN" dirty="0" smtClean="0"/>
+              <a:t>Feature Extraction (TF-IDF)</a:t>
+            </a:r>
+            <a:endParaRPr lang="en-IN" dirty="0"/>
+          </a:p>
+        </p:txBody>
+      </p:sp>
+      <p:sp>
+        <p:nvSpPr>
+          <p:cNvPr id="3" name="Content Placeholder 2"/>
+          <p:cNvSpPr>
+            <a:spLocks noGrp="1"/>
+          </p:cNvSpPr>
+          <p:nvPr>
+            <p:ph idx="1"/>
+          </p:nvPr>
+        </p:nvSpPr>
+        <p:spPr/>
+        <p:txBody>
+          <a:bodyPr>
+            <a:normAutofit/>
+          </a:bodyPr>
+          <a:lstStyle/>
+          <a:p>
+            <a:r>
+              <a:rPr lang="en-IN" dirty="0" smtClean="0"/>
+              <a:t>from </a:t>
+            </a:r>
+            <a:r>
+              <a:rPr lang="en-IN" dirty="0" err="1" smtClean="0"/>
+              <a:t>sklearn.feature_extraction.text</a:t>
+            </a:r>
+            <a:r>
+              <a:rPr lang="en-IN" dirty="0" smtClean="0"/>
+              <a:t> import </a:t>
+            </a:r>
+            <a:r>
+              <a:rPr lang="en-IN" dirty="0" err="1" smtClean="0"/>
+              <a:t>TfidfVectorizer</a:t>
+            </a:r>
+            <a:endParaRPr lang="en-IN" dirty="0" smtClean="0"/>
+          </a:p>
+          <a:p>
+            <a:endParaRPr lang="en-IN" dirty="0" smtClean="0"/>
+          </a:p>
+          <a:p>
+            <a:r>
+              <a:rPr lang="en-IN" dirty="0" err="1" smtClean="0"/>
+              <a:t>vectorizer</a:t>
+            </a:r>
+            <a:r>
+              <a:rPr lang="en-IN" dirty="0" smtClean="0"/>
+              <a:t> = </a:t>
+            </a:r>
+            <a:r>
+              <a:rPr lang="en-IN" dirty="0" err="1" smtClean="0"/>
+              <a:t>TfidfVectorizer</a:t>
+            </a:r>
+            <a:r>
+              <a:rPr lang="en-IN" dirty="0" smtClean="0"/>
+              <a:t>()</a:t>
+            </a:r>
+          </a:p>
+          <a:p>
+            <a:endParaRPr lang="en-IN" dirty="0" smtClean="0"/>
+          </a:p>
+          <a:p>
+            <a:r>
+              <a:rPr lang="en-IN" dirty="0" err="1" smtClean="0"/>
+              <a:t>def</a:t>
+            </a:r>
+            <a:r>
+              <a:rPr lang="en-IN" dirty="0" smtClean="0"/>
+              <a:t> </a:t>
+            </a:r>
+            <a:r>
+              <a:rPr lang="en-IN" dirty="0" err="1" smtClean="0"/>
+              <a:t>vectorize_text</a:t>
+            </a:r>
+            <a:r>
+              <a:rPr lang="en-IN" dirty="0" smtClean="0"/>
+              <a:t>(resumes):</a:t>
+            </a:r>
+          </a:p>
+          <a:p>
+            <a:r>
+              <a:rPr lang="en-IN" dirty="0" smtClean="0"/>
+              <a:t>    X = </a:t>
+            </a:r>
+            <a:r>
+              <a:rPr lang="en-IN" dirty="0" err="1" smtClean="0"/>
+              <a:t>vectorizer.fit_transform</a:t>
+            </a:r>
+            <a:r>
+              <a:rPr lang="en-IN" dirty="0" smtClean="0"/>
+              <a:t>(resumes)</a:t>
+            </a:r>
+          </a:p>
+          <a:p>
+            <a:r>
+              <a:rPr lang="en-IN" dirty="0" smtClean="0"/>
+              <a:t>    return X</a:t>
+            </a:r>
+            <a:endParaRPr lang="en-IN" dirty="0"/>
+          </a:p>
+        </p:txBody>
+      </p:sp>
+    </p:spTree>
+    <p:extLst>
+      <p:ext uri="{BB962C8B-B14F-4D97-AF65-F5344CB8AC3E}">
+        <p14:creationId xmlns:p14="http://schemas.microsoft.com/office/powerpoint/2010/main" val="3662421780"/>
+      </p:ext>
+    </p:extLst>
+  </p:cSld>
+  <p:clrMapOvr>
+    <a:masterClrMapping/>
+  </p:clrMapOvr>
+</p:sld>
+</file>
+
+<file path=ppt/slides/slide31.xml><?xml version="1.0" encoding="utf-8"?>
+<p:sld xmlns:a="http://schemas.openxmlformats.org/drawingml/2006/main" xmlns:r="http://schemas.openxmlformats.org/officeDocument/2006/relationships" xmlns:p="http://schemas.openxmlformats.org/presentationml/2006/main">
+  <p:cSld>
+    <p:spTree>
+      <p:nvGrpSpPr>
+        <p:cNvPr id="1" name=""/>
+        <p:cNvGrpSpPr/>
+        <p:nvPr/>
+      </p:nvGrpSpPr>
+      <p:grpSpPr>
+        <a:xfrm>
+          <a:off x="0" y="0"/>
+          <a:ext cx="0" cy="0"/>
+          <a:chOff x="0" y="0"/>
+          <a:chExt cx="0" cy="0"/>
+        </a:xfrm>
+      </p:grpSpPr>
+      <p:sp>
+        <p:nvSpPr>
+          <p:cNvPr id="2" name="Title 1"/>
+          <p:cNvSpPr>
+            <a:spLocks noGrp="1"/>
+          </p:cNvSpPr>
+          <p:nvPr>
+            <p:ph type="title"/>
+          </p:nvPr>
+        </p:nvSpPr>
+        <p:spPr/>
+        <p:txBody>
+          <a:bodyPr/>
+          <a:lstStyle/>
+          <a:p>
+            <a:r>
+              <a:rPr lang="en-IN" dirty="0" smtClean="0"/>
+              <a:t>Model Training</a:t>
+            </a:r>
+            <a:endParaRPr lang="en-IN" dirty="0"/>
+          </a:p>
+        </p:txBody>
+      </p:sp>
+      <p:sp>
+        <p:nvSpPr>
+          <p:cNvPr id="3" name="Content Placeholder 2"/>
+          <p:cNvSpPr>
+            <a:spLocks noGrp="1"/>
+          </p:cNvSpPr>
+          <p:nvPr>
+            <p:ph idx="1"/>
+          </p:nvPr>
+        </p:nvSpPr>
+        <p:spPr/>
+        <p:txBody>
+          <a:bodyPr>
+            <a:normAutofit lnSpcReduction="10000"/>
+          </a:bodyPr>
+          <a:lstStyle/>
+          <a:p>
+            <a:r>
+              <a:rPr lang="en-IN" dirty="0" smtClean="0"/>
+              <a:t>from </a:t>
+            </a:r>
+            <a:r>
+              <a:rPr lang="en-IN" dirty="0" err="1" smtClean="0"/>
+              <a:t>sklearn.model_selection</a:t>
+            </a:r>
+            <a:r>
+              <a:rPr lang="en-IN" dirty="0" smtClean="0"/>
+              <a:t> import </a:t>
+            </a:r>
+            <a:r>
+              <a:rPr lang="en-IN" dirty="0" err="1" smtClean="0"/>
+              <a:t>train_test_split</a:t>
+            </a:r>
+            <a:endParaRPr lang="en-IN" dirty="0" smtClean="0"/>
+          </a:p>
+          <a:p>
+            <a:r>
+              <a:rPr lang="en-IN" dirty="0" smtClean="0"/>
+              <a:t>from </a:t>
+            </a:r>
+            <a:r>
+              <a:rPr lang="en-IN" dirty="0" err="1" smtClean="0"/>
+              <a:t>sklearn.linear_model</a:t>
+            </a:r>
+            <a:r>
+              <a:rPr lang="en-IN" dirty="0" smtClean="0"/>
+              <a:t> import </a:t>
+            </a:r>
+            <a:r>
+              <a:rPr lang="en-IN" dirty="0" err="1" smtClean="0"/>
+              <a:t>LogisticRegression</a:t>
+            </a:r>
+            <a:endParaRPr lang="en-IN" dirty="0" smtClean="0"/>
+          </a:p>
+          <a:p>
+            <a:endParaRPr lang="en-IN" dirty="0" smtClean="0"/>
+          </a:p>
+          <a:p>
+            <a:r>
+              <a:rPr lang="en-IN" dirty="0" err="1" smtClean="0"/>
+              <a:t>X_train</a:t>
+            </a:r>
+            <a:r>
+              <a:rPr lang="en-IN" dirty="0" smtClean="0"/>
+              <a:t>, </a:t>
+            </a:r>
+            <a:r>
+              <a:rPr lang="en-IN" dirty="0" err="1" smtClean="0"/>
+              <a:t>X_test</a:t>
+            </a:r>
+            <a:r>
+              <a:rPr lang="en-IN" dirty="0" smtClean="0"/>
+              <a:t>, </a:t>
+            </a:r>
+            <a:r>
+              <a:rPr lang="en-IN" dirty="0" err="1" smtClean="0"/>
+              <a:t>y_train</a:t>
+            </a:r>
+            <a:r>
+              <a:rPr lang="en-IN" dirty="0" smtClean="0"/>
+              <a:t>, </a:t>
+            </a:r>
+            <a:r>
+              <a:rPr lang="en-IN" dirty="0" err="1" smtClean="0"/>
+              <a:t>y_test</a:t>
+            </a:r>
+            <a:r>
+              <a:rPr lang="en-IN" dirty="0" smtClean="0"/>
+              <a:t> = </a:t>
+            </a:r>
+            <a:r>
+              <a:rPr lang="en-IN" dirty="0" err="1" smtClean="0"/>
+              <a:t>train_test_split</a:t>
+            </a:r>
+            <a:r>
+              <a:rPr lang="en-IN" dirty="0" smtClean="0"/>
+              <a:t>(X, y, </a:t>
+            </a:r>
+            <a:r>
+              <a:rPr lang="en-IN" dirty="0" err="1" smtClean="0"/>
+              <a:t>test_size</a:t>
+            </a:r>
+            <a:r>
+              <a:rPr lang="en-IN" dirty="0" smtClean="0"/>
+              <a:t>=0.2)</a:t>
+            </a:r>
+          </a:p>
+          <a:p>
+            <a:endParaRPr lang="en-IN" dirty="0" smtClean="0"/>
+          </a:p>
+          <a:p>
+            <a:r>
+              <a:rPr lang="en-IN" dirty="0" smtClean="0"/>
+              <a:t>model = </a:t>
+            </a:r>
+            <a:r>
+              <a:rPr lang="en-IN" dirty="0" err="1" smtClean="0"/>
+              <a:t>LogisticRegression</a:t>
+            </a:r>
+            <a:r>
+              <a:rPr lang="en-IN" dirty="0" smtClean="0"/>
+              <a:t>()</a:t>
+            </a:r>
+          </a:p>
+          <a:p>
+            <a:r>
+              <a:rPr lang="en-IN" dirty="0" err="1" smtClean="0"/>
+              <a:t>model.fit</a:t>
+            </a:r>
+            <a:r>
+              <a:rPr lang="en-IN" dirty="0" smtClean="0"/>
+              <a:t>(</a:t>
+            </a:r>
+            <a:r>
+              <a:rPr lang="en-IN" dirty="0" err="1" smtClean="0"/>
+              <a:t>X_train</a:t>
+            </a:r>
+            <a:r>
+              <a:rPr lang="en-IN" dirty="0" smtClean="0"/>
+              <a:t>, </a:t>
+            </a:r>
+            <a:r>
+              <a:rPr lang="en-IN" dirty="0" err="1" smtClean="0"/>
+              <a:t>y_train</a:t>
+            </a:r>
+            <a:r>
+              <a:rPr lang="en-IN" dirty="0" smtClean="0"/>
+              <a:t>)</a:t>
+            </a:r>
+            <a:endParaRPr lang="en-IN" dirty="0"/>
+          </a:p>
+        </p:txBody>
+      </p:sp>
+    </p:spTree>
+    <p:extLst>
+      <p:ext uri="{BB962C8B-B14F-4D97-AF65-F5344CB8AC3E}">
+        <p14:creationId xmlns:p14="http://schemas.microsoft.com/office/powerpoint/2010/main" val="1137611807"/>
+      </p:ext>
+    </p:extLst>
+  </p:cSld>
+  <p:clrMapOvr>
+    <a:masterClrMapping/>
+  </p:clrMapOvr>
+</p:sld>
+</file>
+
+<file path=ppt/slides/slide32.xml><?xml version="1.0" encoding="utf-8"?>
+<p:sld xmlns:a="http://schemas.openxmlformats.org/drawingml/2006/main" xmlns:r="http://schemas.openxmlformats.org/officeDocument/2006/relationships" xmlns:p="http://schemas.openxmlformats.org/presentationml/2006/main">
+  <p:cSld>
+    <p:spTree>
+      <p:nvGrpSpPr>
+        <p:cNvPr id="1" name=""/>
+        <p:cNvGrpSpPr/>
+        <p:nvPr/>
+      </p:nvGrpSpPr>
+      <p:grpSpPr>
+        <a:xfrm>
+          <a:off x="0" y="0"/>
+          <a:ext cx="0" cy="0"/>
+          <a:chOff x="0" y="0"/>
+          <a:chExt cx="0" cy="0"/>
+        </a:xfrm>
+      </p:grpSpPr>
+      <p:sp>
+        <p:nvSpPr>
+          <p:cNvPr id="2" name="Title 1"/>
+          <p:cNvSpPr>
+            <a:spLocks noGrp="1"/>
+          </p:cNvSpPr>
+          <p:nvPr>
+            <p:ph type="title"/>
+          </p:nvPr>
+        </p:nvSpPr>
+        <p:spPr/>
+        <p:txBody>
+          <a:bodyPr/>
+          <a:lstStyle/>
+          <a:p>
+            <a:r>
+              <a:rPr lang="en-IN" dirty="0" smtClean="0"/>
+              <a:t>Resume Matching Score</a:t>
+            </a:r>
+            <a:endParaRPr lang="en-IN" dirty="0"/>
+          </a:p>
+        </p:txBody>
+      </p:sp>
+      <p:sp>
+        <p:nvSpPr>
+          <p:cNvPr id="3" name="Content Placeholder 2"/>
+          <p:cNvSpPr>
+            <a:spLocks noGrp="1"/>
+          </p:cNvSpPr>
+          <p:nvPr>
+            <p:ph idx="1"/>
+          </p:nvPr>
+        </p:nvSpPr>
+        <p:spPr/>
+        <p:txBody>
+          <a:bodyPr>
+            <a:normAutofit/>
+          </a:bodyPr>
+          <a:lstStyle/>
+          <a:p>
+            <a:r>
+              <a:rPr lang="en-IN" dirty="0" smtClean="0"/>
+              <a:t>from </a:t>
+            </a:r>
+            <a:r>
+              <a:rPr lang="en-IN" dirty="0" err="1" smtClean="0"/>
+              <a:t>sklearn.metrics.pairwise</a:t>
+            </a:r>
+            <a:r>
+              <a:rPr lang="en-IN" dirty="0" smtClean="0"/>
+              <a:t> import </a:t>
+            </a:r>
+            <a:r>
+              <a:rPr lang="en-IN" dirty="0" err="1" smtClean="0"/>
+              <a:t>cosine_similarity</a:t>
+            </a:r>
+            <a:endParaRPr lang="en-IN" dirty="0" smtClean="0"/>
+          </a:p>
+          <a:p>
+            <a:endParaRPr lang="en-IN" dirty="0" smtClean="0"/>
+          </a:p>
+          <a:p>
+            <a:r>
+              <a:rPr lang="en-IN" dirty="0" err="1" smtClean="0"/>
+              <a:t>def</a:t>
+            </a:r>
+            <a:r>
+              <a:rPr lang="en-IN" dirty="0" smtClean="0"/>
+              <a:t> </a:t>
+            </a:r>
+            <a:r>
+              <a:rPr lang="en-IN" dirty="0" err="1" smtClean="0"/>
+              <a:t>match_score</a:t>
+            </a:r>
+            <a:r>
+              <a:rPr lang="en-IN" dirty="0" smtClean="0"/>
+              <a:t>(</a:t>
+            </a:r>
+            <a:r>
+              <a:rPr lang="en-IN" dirty="0" err="1" smtClean="0"/>
+              <a:t>job_desc</a:t>
+            </a:r>
+            <a:r>
+              <a:rPr lang="en-IN" dirty="0" smtClean="0"/>
+              <a:t>, resume):</a:t>
+            </a:r>
+          </a:p>
+          <a:p>
+            <a:r>
+              <a:rPr lang="en-IN" dirty="0" smtClean="0"/>
+              <a:t>    vectors = </a:t>
+            </a:r>
+            <a:r>
+              <a:rPr lang="en-IN" dirty="0" err="1" smtClean="0"/>
+              <a:t>vectorizer.transform</a:t>
+            </a:r>
+            <a:r>
+              <a:rPr lang="en-IN" dirty="0" smtClean="0"/>
+              <a:t>([</a:t>
+            </a:r>
+            <a:r>
+              <a:rPr lang="en-IN" dirty="0" err="1" smtClean="0"/>
+              <a:t>job_desc</a:t>
+            </a:r>
+            <a:r>
+              <a:rPr lang="en-IN" dirty="0" smtClean="0"/>
+              <a:t>, resume])</a:t>
+            </a:r>
+          </a:p>
+          <a:p>
+            <a:r>
+              <a:rPr lang="en-IN" dirty="0" smtClean="0"/>
+              <a:t>    score = </a:t>
+            </a:r>
+            <a:r>
+              <a:rPr lang="en-IN" dirty="0" err="1" smtClean="0"/>
+              <a:t>cosine_similarity</a:t>
+            </a:r>
+            <a:r>
+              <a:rPr lang="en-IN" dirty="0" smtClean="0"/>
+              <a:t>(vectors[0], vectors[1])</a:t>
+            </a:r>
+          </a:p>
+          <a:p>
+            <a:r>
+              <a:rPr lang="en-IN" dirty="0" smtClean="0"/>
+              <a:t>    return score[0][0]</a:t>
+            </a:r>
+            <a:endParaRPr lang="en-IN" dirty="0"/>
+          </a:p>
+        </p:txBody>
+      </p:sp>
+    </p:spTree>
+    <p:extLst>
+      <p:ext uri="{BB962C8B-B14F-4D97-AF65-F5344CB8AC3E}">
+        <p14:creationId xmlns:p14="http://schemas.microsoft.com/office/powerpoint/2010/main" val="4193556206"/>
+      </p:ext>
+    </p:extLst>
+  </p:cSld>
+  <p:clrMapOvr>
+    <a:masterClrMapping/>
+  </p:clrMapOvr>
+</p:sld>
+</file>
+
+<file path=ppt/slides/slide33.xml><?xml version="1.0" encoding="utf-8"?>
+<p:sld xmlns:a="http://schemas.openxmlformats.org/drawingml/2006/main" xmlns:r="http://schemas.openxmlformats.org/officeDocument/2006/relationships" xmlns:p="http://schemas.openxmlformats.org/presentationml/2006/main">
+  <p:cSld>
+    <p:spTree>
+      <p:nvGrpSpPr>
+        <p:cNvPr id="1" name=""/>
+        <p:cNvGrpSpPr/>
+        <p:nvPr/>
+      </p:nvGrpSpPr>
+      <p:grpSpPr>
+        <a:xfrm>
+          <a:off x="0" y="0"/>
+          <a:ext cx="0" cy="0"/>
+          <a:chOff x="0" y="0"/>
+          <a:chExt cx="0" cy="0"/>
+        </a:xfrm>
+      </p:grpSpPr>
+      <p:sp>
+        <p:nvSpPr>
+          <p:cNvPr id="2" name="Title 1"/>
+          <p:cNvSpPr>
+            <a:spLocks noGrp="1"/>
+          </p:cNvSpPr>
+          <p:nvPr>
+            <p:ph type="title"/>
+          </p:nvPr>
+        </p:nvSpPr>
+        <p:spPr/>
+        <p:txBody>
+          <a:bodyPr/>
+          <a:lstStyle/>
+          <a:p>
+            <a:r>
+              <a:rPr lang="en-IN" dirty="0" smtClean="0"/>
+              <a:t>Candidate Ranking</a:t>
+            </a:r>
+            <a:endParaRPr lang="en-IN" dirty="0"/>
+          </a:p>
+        </p:txBody>
+      </p:sp>
+      <p:sp>
+        <p:nvSpPr>
+          <p:cNvPr id="3" name="Content Placeholder 2"/>
+          <p:cNvSpPr>
+            <a:spLocks noGrp="1"/>
+          </p:cNvSpPr>
+          <p:nvPr>
+            <p:ph idx="1"/>
+          </p:nvPr>
+        </p:nvSpPr>
+        <p:spPr/>
+        <p:txBody>
+          <a:bodyPr>
+            <a:normAutofit fontScale="92500" lnSpcReduction="20000"/>
+          </a:bodyPr>
+          <a:lstStyle/>
+          <a:p>
+            <a:r>
+              <a:rPr lang="en-US" dirty="0" smtClean="0"/>
+              <a:t>candidates = [</a:t>
+            </a:r>
+          </a:p>
+          <a:p>
+            <a:r>
+              <a:rPr lang="en-US" dirty="0" smtClean="0"/>
+              <a:t>    {"name": "A", "score": 0.85},</a:t>
+            </a:r>
+          </a:p>
+          <a:p>
+            <a:r>
+              <a:rPr lang="en-US" dirty="0" smtClean="0"/>
+              <a:t>    {"name": "B", "score": 0.65},</a:t>
+            </a:r>
+          </a:p>
+          <a:p>
+            <a:r>
+              <a:rPr lang="en-US" dirty="0" smtClean="0"/>
+              <a:t>    {"name": "C", "score": 0.92}</a:t>
+            </a:r>
+          </a:p>
+          <a:p>
+            <a:r>
+              <a:rPr lang="en-US" dirty="0" smtClean="0"/>
+              <a:t>]</a:t>
+            </a:r>
+          </a:p>
+          <a:p>
+            <a:endParaRPr lang="en-US" dirty="0" smtClean="0"/>
+          </a:p>
+          <a:p>
+            <a:r>
+              <a:rPr lang="en-US" dirty="0" smtClean="0"/>
+              <a:t>ranked = sorted(candidates, key=lambda x: x['score'], reverse=True)</a:t>
+            </a:r>
+          </a:p>
+          <a:p>
+            <a:endParaRPr lang="en-US" dirty="0" smtClean="0"/>
+          </a:p>
+          <a:p>
+            <a:r>
+              <a:rPr lang="en-US" dirty="0" smtClean="0"/>
+              <a:t>for c in ranked:</a:t>
+            </a:r>
+          </a:p>
+          <a:p>
+            <a:r>
+              <a:rPr lang="en-US" dirty="0" smtClean="0"/>
+              <a:t>    print(c)</a:t>
+            </a:r>
+            <a:endParaRPr lang="en-IN" dirty="0"/>
+          </a:p>
+        </p:txBody>
+      </p:sp>
+    </p:spTree>
+    <p:extLst>
+      <p:ext uri="{BB962C8B-B14F-4D97-AF65-F5344CB8AC3E}">
+        <p14:creationId xmlns:p14="http://schemas.microsoft.com/office/powerpoint/2010/main" val="3634616223"/>
+      </p:ext>
+    </p:extLst>
+  </p:cSld>
+  <p:clrMapOvr>
+    <a:masterClrMapping/>
+  </p:clrMapOvr>
+</p:sld>
+</file>
+
+<file path=ppt/slides/slide34.xml><?xml version="1.0" encoding="utf-8"?>
+<p:sld xmlns:a="http://schemas.openxmlformats.org/drawingml/2006/main" xmlns:r="http://schemas.openxmlformats.org/officeDocument/2006/relationships" xmlns:p="http://schemas.openxmlformats.org/presentationml/2006/main">
+  <p:cSld>
+    <p:spTree>
+      <p:nvGrpSpPr>
+        <p:cNvPr id="1" name=""/>
+        <p:cNvGrpSpPr/>
+        <p:nvPr/>
+      </p:nvGrpSpPr>
+      <p:grpSpPr>
+        <a:xfrm>
+          <a:off x="0" y="0"/>
+          <a:ext cx="0" cy="0"/>
+          <a:chOff x="0" y="0"/>
+          <a:chExt cx="0" cy="0"/>
+        </a:xfrm>
+      </p:grpSpPr>
+      <p:sp>
+        <p:nvSpPr>
+          <p:cNvPr id="2" name="Title 1"/>
+          <p:cNvSpPr>
+            <a:spLocks noGrp="1"/>
+          </p:cNvSpPr>
+          <p:nvPr>
+            <p:ph type="title"/>
+          </p:nvPr>
+        </p:nvSpPr>
+        <p:spPr/>
+        <p:txBody>
+          <a:bodyPr/>
+          <a:lstStyle/>
+          <a:p>
+            <a:r>
+              <a:rPr lang="en-IN" dirty="0" smtClean="0"/>
+              <a:t>Output Example</a:t>
+            </a:r>
+            <a:endParaRPr lang="en-IN" dirty="0"/>
+          </a:p>
+        </p:txBody>
+      </p:sp>
+      <p:sp>
+        <p:nvSpPr>
+          <p:cNvPr id="3" name="Content Placeholder 2"/>
+          <p:cNvSpPr>
+            <a:spLocks noGrp="1"/>
+          </p:cNvSpPr>
+          <p:nvPr>
+            <p:ph idx="1"/>
+          </p:nvPr>
+        </p:nvSpPr>
+        <p:spPr/>
+        <p:txBody>
+          <a:bodyPr/>
+          <a:lstStyle/>
+          <a:p>
+            <a:r>
+              <a:rPr lang="en-IN" dirty="0" smtClean="0"/>
+              <a:t>Resume 1 → Score: 0.92  </a:t>
+            </a:r>
+          </a:p>
+          <a:p>
+            <a:r>
+              <a:rPr lang="en-IN" dirty="0" smtClean="0"/>
+              <a:t>Resume 2 → Score: 0.85  </a:t>
+            </a:r>
+          </a:p>
+          <a:p>
+            <a:r>
+              <a:rPr lang="en-IN" dirty="0" smtClean="0"/>
+              <a:t>Resume 3 → Score: 0.65 </a:t>
+            </a:r>
+            <a:endParaRPr lang="en-IN" dirty="0"/>
+          </a:p>
+        </p:txBody>
+      </p:sp>
+    </p:spTree>
+    <p:extLst>
+      <p:ext uri="{BB962C8B-B14F-4D97-AF65-F5344CB8AC3E}">
+        <p14:creationId xmlns:p14="http://schemas.microsoft.com/office/powerpoint/2010/main" val="722148785"/>
+      </p:ext>
+    </p:extLst>
+  </p:cSld>
+  <p:clrMapOvr>
+    <a:masterClrMapping/>
+  </p:clrMapOvr>
+</p:sld>
+</file>
+
+<file path=ppt/slides/slide35.xml><?xml version="1.0" encoding="utf-8"?>
+<p:sld xmlns:a="http://schemas.openxmlformats.org/drawingml/2006/main" xmlns:r="http://schemas.openxmlformats.org/officeDocument/2006/relationships" xmlns:p="http://schemas.openxmlformats.org/presentationml/2006/main">
+  <p:cSld>
+    <p:spTree>
+      <p:nvGrpSpPr>
+        <p:cNvPr id="1" name=""/>
+        <p:cNvGrpSpPr/>
+        <p:nvPr/>
+      </p:nvGrpSpPr>
+      <p:grpSpPr>
+        <a:xfrm>
+          <a:off x="0" y="0"/>
+          <a:ext cx="0" cy="0"/>
+          <a:chOff x="0" y="0"/>
+          <a:chExt cx="0" cy="0"/>
+        </a:xfrm>
+      </p:grpSpPr>
+      <p:sp>
+        <p:nvSpPr>
+          <p:cNvPr id="2" name="Title 1"/>
+          <p:cNvSpPr>
+            <a:spLocks noGrp="1"/>
+          </p:cNvSpPr>
+          <p:nvPr>
+            <p:ph type="title"/>
+          </p:nvPr>
+        </p:nvSpPr>
+        <p:spPr/>
+        <p:txBody>
+          <a:bodyPr/>
+          <a:lstStyle/>
+          <a:p>
+            <a:r>
+              <a:rPr lang="en-IN" dirty="0" smtClean="0"/>
+              <a:t>References</a:t>
+            </a:r>
+            <a:endParaRPr lang="en-IN" dirty="0"/>
+          </a:p>
+        </p:txBody>
+      </p:sp>
+      <p:sp>
+        <p:nvSpPr>
+          <p:cNvPr id="3" name="Content Placeholder 2"/>
+          <p:cNvSpPr>
+            <a:spLocks noGrp="1"/>
+          </p:cNvSpPr>
+          <p:nvPr>
+            <p:ph idx="1"/>
+          </p:nvPr>
+        </p:nvSpPr>
+        <p:spPr/>
+        <p:txBody>
+          <a:bodyPr/>
+          <a:lstStyle/>
+          <a:p>
+            <a:r>
+              <a:rPr lang="en-US" dirty="0" smtClean="0"/>
+              <a:t>Research papers on AI in recruitment </a:t>
+            </a:r>
+          </a:p>
+          <a:p>
+            <a:r>
+              <a:rPr lang="en-US" dirty="0" smtClean="0"/>
+              <a:t>NLP documentation </a:t>
+            </a:r>
+          </a:p>
+          <a:p>
+            <a:r>
+              <a:rPr lang="en-US" dirty="0" smtClean="0"/>
+              <a:t>Machine learning resources</a:t>
+            </a:r>
+            <a:endParaRPr lang="en-IN" dirty="0"/>
+          </a:p>
+        </p:txBody>
+      </p:sp>
+    </p:spTree>
+    <p:extLst>
+      <p:ext uri="{BB962C8B-B14F-4D97-AF65-F5344CB8AC3E}">
+        <p14:creationId xmlns:p14="http://schemas.microsoft.com/office/powerpoint/2010/main" val="3874796558"/>
       </p:ext>
     </p:extLst>
   </p:cSld>
